--- a/260626_15기_구미_4_관통PJT_김민준_정희성.pptx
+++ b/260626_15기_구미_4_관통PJT_김민준_정희성.pptx
@@ -31,14 +31,21 @@
   <p:notesSz cx="10287000" cy="18288000"/>
   <p:embeddedFontLst>
     <p:embeddedFont>
-      <p:font typeface="Microsoft YaHei" panose="020B0503020204020204" pitchFamily="34" charset="-122"/>
+      <p:font typeface="Calibri" panose="020F0502020204030204" pitchFamily="34" charset="0"/>
       <p:regular r:id="rId21"/>
       <p:bold r:id="rId22"/>
+      <p:italic r:id="rId23"/>
+      <p:boldItalic r:id="rId24"/>
     </p:embeddedFont>
     <p:embeddedFont>
-      <p:font typeface="맑은 고딕" panose="020B0503020000020004" pitchFamily="34" charset="-127"/>
-      <p:regular r:id="rId23"/>
-      <p:bold r:id="rId24"/>
+      <p:font typeface="Microsoft YaHei" panose="020B0503020204020204" pitchFamily="34" charset="-122"/>
+      <p:regular r:id="rId25"/>
+      <p:bold r:id="rId26"/>
+    </p:embeddedFont>
+    <p:embeddedFont>
+      <p:font typeface="맑은 고딕" panose="020B0503020000020004" pitchFamily="50" charset="-127"/>
+      <p:regular r:id="rId27"/>
+      <p:bold r:id="rId28"/>
     </p:embeddedFont>
   </p:embeddedFontLst>
   <p:defaultTextStyle>
@@ -311,8 +318,146 @@
           <a:lstStyle/>
           <a:p>
             <a:r>
-              <a:rPr lang="en-US" dirty="0"/>
-              <a:t>안녕하세요. 함께 계획하고 함께 정산하는 국내형 그룹 여행 협업 플랫폼 Groutrip 입니다. 흩어진 단톡방 여행 계획을 한 장의 티켓으로 모았습니다. SSAFY 2인 팀 프로젝트입니다.</a:t>
+              <a:rPr lang="ko-KR" altLang="en-US" dirty="0"/>
+              <a:t>안녕하세요</a:t>
+            </a:r>
+            <a:r>
+              <a:rPr lang="en-US" altLang="ko-KR" dirty="0"/>
+              <a:t>.</a:t>
+            </a:r>
+            <a:br>
+              <a:rPr lang="en-US" altLang="ko-KR" dirty="0"/>
+            </a:br>
+            <a:r>
+              <a:rPr lang="ko-KR" altLang="en-US" dirty="0"/>
+              <a:t>저희가 개발한 국내형 그룹 여행 협업 플랫폼 </a:t>
+            </a:r>
+            <a:r>
+              <a:rPr lang="en-US" altLang="ko-KR" b="1" dirty="0" err="1"/>
+              <a:t>Groutrip</a:t>
+            </a:r>
+            <a:r>
+              <a:rPr lang="ko-KR" altLang="en-US" b="1" dirty="0"/>
+              <a:t>에 대해서 발표 시작하겠습니다</a:t>
+            </a:r>
+            <a:r>
+              <a:rPr lang="en-US" altLang="ko-KR" b="1" dirty="0"/>
+              <a:t>.</a:t>
+            </a:r>
+            <a:endParaRPr lang="en-US" altLang="ko-KR" dirty="0"/>
+          </a:p>
+          <a:p>
+            <a:r>
+              <a:rPr lang="en-US" altLang="ko-KR" dirty="0" err="1"/>
+              <a:t>Groutrip</a:t>
+            </a:r>
+            <a:r>
+              <a:rPr lang="ko-KR" altLang="en-US" dirty="0"/>
+              <a:t>은 친구</a:t>
+            </a:r>
+            <a:r>
+              <a:rPr lang="en-US" altLang="ko-KR" dirty="0"/>
+              <a:t>, </a:t>
+            </a:r>
+            <a:r>
+              <a:rPr lang="ko-KR" altLang="en-US" dirty="0"/>
+              <a:t>가족</a:t>
+            </a:r>
+            <a:r>
+              <a:rPr lang="en-US" altLang="ko-KR" dirty="0"/>
+              <a:t>, </a:t>
+            </a:r>
+            <a:r>
+              <a:rPr lang="ko-KR" altLang="en-US" dirty="0"/>
+              <a:t>동아리처럼 여러 명이 함께 여행을 준비할 때 생기는 불편함을 해결하기 위한 서비스입니다</a:t>
+            </a:r>
+            <a:r>
+              <a:rPr lang="en-US" altLang="ko-KR" dirty="0"/>
+              <a:t>.</a:t>
+            </a:r>
+          </a:p>
+          <a:p>
+            <a:r>
+              <a:rPr lang="ko-KR" altLang="en-US" dirty="0"/>
+              <a:t>보통 여행 계획은 </a:t>
+            </a:r>
+            <a:r>
+              <a:rPr lang="ko-KR" altLang="en-US" dirty="0" err="1"/>
+              <a:t>단톡방에서</a:t>
+            </a:r>
+            <a:r>
+              <a:rPr lang="ko-KR" altLang="en-US" dirty="0"/>
+              <a:t> 시작하지만</a:t>
+            </a:r>
+            <a:r>
+              <a:rPr lang="en-US" altLang="ko-KR" dirty="0"/>
+              <a:t>, </a:t>
+            </a:r>
+            <a:r>
+              <a:rPr lang="ko-KR" altLang="en-US" dirty="0"/>
+              <a:t>장소는 </a:t>
+            </a:r>
+            <a:r>
+              <a:rPr lang="ko-KR" altLang="en-US" dirty="0" err="1"/>
+              <a:t>지도앱에</a:t>
+            </a:r>
+            <a:r>
+              <a:rPr lang="ko-KR" altLang="en-US" dirty="0"/>
+              <a:t> 저장하고</a:t>
+            </a:r>
+            <a:r>
+              <a:rPr lang="en-US" altLang="ko-KR" dirty="0"/>
+              <a:t>, </a:t>
+            </a:r>
+            <a:r>
+              <a:rPr lang="ko-KR" altLang="en-US" dirty="0"/>
+              <a:t>일정은 </a:t>
+            </a:r>
+            <a:r>
+              <a:rPr lang="ko-KR" altLang="en-US" dirty="0" err="1"/>
+              <a:t>메모앱에</a:t>
+            </a:r>
+            <a:r>
+              <a:rPr lang="ko-KR" altLang="en-US" dirty="0"/>
+              <a:t> 적고</a:t>
+            </a:r>
+            <a:r>
+              <a:rPr lang="en-US" altLang="ko-KR" dirty="0"/>
+              <a:t>, </a:t>
+            </a:r>
+            <a:r>
+              <a:rPr lang="ko-KR" altLang="en-US" dirty="0"/>
+              <a:t>정산은 따로 계산하게 됩니다</a:t>
+            </a:r>
+            <a:r>
+              <a:rPr lang="en-US" altLang="ko-KR" dirty="0"/>
+              <a:t>.</a:t>
+            </a:r>
+          </a:p>
+          <a:p>
+            <a:r>
+              <a:rPr lang="ko-KR" altLang="en-US" dirty="0"/>
+              <a:t>저희는 이렇게 흩어진 여행 준비 과정을 하나의 서비스 안에서 함께 계획하고</a:t>
+            </a:r>
+            <a:r>
+              <a:rPr lang="en-US" altLang="ko-KR" dirty="0"/>
+              <a:t>, </a:t>
+            </a:r>
+            <a:r>
+              <a:rPr lang="ko-KR" altLang="en-US" dirty="0"/>
+              <a:t>결정하고</a:t>
+            </a:r>
+            <a:r>
+              <a:rPr lang="en-US" altLang="ko-KR" dirty="0"/>
+              <a:t>, </a:t>
+            </a:r>
+            <a:r>
+              <a:rPr lang="ko-KR" altLang="en-US" dirty="0"/>
+              <a:t>정산할 수 있도록 만들었습니다</a:t>
+            </a:r>
+            <a:r>
+              <a:rPr lang="en-US" altLang="ko-KR" dirty="0"/>
+              <a:t>.</a:t>
             </a:r>
           </a:p>
         </p:txBody>
@@ -398,8 +543,162 @@
           <a:lstStyle/>
           <a:p>
             <a:r>
-              <a:rPr lang="en-US" dirty="0"/>
-              <a:t>세 번째 기능은 일정 빌더와 일정 지도입니다. 드래그로 타임라인에 장소를 배치하면, 카카오 API가 장소 간 이동 시간과 비용을 계산하고, 카카오 지도에 일자별로 핀을 찍어 줍니다. 하루 동선이 한 장의 탑승권처럼 정리됩니다.</a:t>
+              <a:rPr lang="ko-KR" altLang="en-US" dirty="0"/>
+              <a:t>세 번째 기능은 </a:t>
+            </a:r>
+            <a:r>
+              <a:rPr lang="ko-KR" altLang="en-US" b="1" dirty="0"/>
+              <a:t>일정 </a:t>
+            </a:r>
+            <a:r>
+              <a:rPr lang="ko-KR" altLang="en-US" b="1" dirty="0" err="1"/>
+              <a:t>빌더와</a:t>
+            </a:r>
+            <a:r>
+              <a:rPr lang="ko-KR" altLang="en-US" b="1" dirty="0"/>
+              <a:t> 일정 지도</a:t>
+            </a:r>
+            <a:r>
+              <a:rPr lang="ko-KR" altLang="en-US" dirty="0"/>
+              <a:t>입니다</a:t>
+            </a:r>
+            <a:r>
+              <a:rPr lang="en-US" altLang="ko-KR" dirty="0"/>
+              <a:t>.</a:t>
+            </a:r>
+          </a:p>
+          <a:p>
+            <a:r>
+              <a:rPr lang="ko-KR" altLang="en-US" dirty="0"/>
+              <a:t>사용자는 저장해둔 장소를 </a:t>
+            </a:r>
+            <a:r>
+              <a:rPr lang="ko-KR" altLang="en-US" dirty="0" err="1"/>
+              <a:t>일자별</a:t>
+            </a:r>
+            <a:r>
+              <a:rPr lang="ko-KR" altLang="en-US" dirty="0"/>
+              <a:t> 타임라인에 배치할 수 있습니다</a:t>
+            </a:r>
+            <a:r>
+              <a:rPr lang="en-US" altLang="ko-KR" dirty="0"/>
+              <a:t>.</a:t>
+            </a:r>
+          </a:p>
+          <a:p>
+            <a:r>
+              <a:rPr lang="ko-KR" altLang="en-US" dirty="0"/>
+              <a:t>예를 들어 오전 </a:t>
+            </a:r>
+            <a:r>
+              <a:rPr lang="en-US" altLang="ko-KR" dirty="0"/>
+              <a:t>9</a:t>
+            </a:r>
+            <a:r>
+              <a:rPr lang="ko-KR" altLang="en-US" dirty="0"/>
+              <a:t>시에 성심당</a:t>
+            </a:r>
+            <a:r>
+              <a:rPr lang="en-US" altLang="ko-KR" dirty="0"/>
+              <a:t>, 12</a:t>
+            </a:r>
+            <a:r>
+              <a:rPr lang="ko-KR" altLang="en-US" dirty="0"/>
+              <a:t>시에 안목해변</a:t>
+            </a:r>
+            <a:r>
+              <a:rPr lang="en-US" altLang="ko-KR" dirty="0"/>
+              <a:t>, 2</a:t>
+            </a:r>
+            <a:r>
+              <a:rPr lang="ko-KR" altLang="en-US" dirty="0"/>
+              <a:t>시 </a:t>
+            </a:r>
+            <a:r>
+              <a:rPr lang="en-US" altLang="ko-KR" dirty="0"/>
+              <a:t>30</a:t>
+            </a:r>
+            <a:r>
+              <a:rPr lang="ko-KR" altLang="en-US" dirty="0"/>
+              <a:t>분에 오죽헌처럼 하루 일정을 순서대로 구성할 수 있습니다</a:t>
+            </a:r>
+            <a:r>
+              <a:rPr lang="en-US" altLang="ko-KR" dirty="0"/>
+              <a:t>.</a:t>
+            </a:r>
+          </a:p>
+          <a:p>
+            <a:r>
+              <a:rPr lang="ko-KR" altLang="en-US" dirty="0"/>
+              <a:t>장소 사이의 이동 시간과 비용은 </a:t>
+            </a:r>
+            <a:r>
+              <a:rPr lang="en-US" altLang="ko-KR" dirty="0" err="1"/>
+              <a:t>Kakao</a:t>
+            </a:r>
+            <a:r>
+              <a:rPr lang="en-US" altLang="ko-KR" dirty="0"/>
+              <a:t> API</a:t>
+            </a:r>
+            <a:r>
+              <a:rPr lang="ko-KR" altLang="en-US" dirty="0"/>
+              <a:t>를 활용해 계산하도록 설계했습니다</a:t>
+            </a:r>
+            <a:r>
+              <a:rPr lang="en-US" altLang="ko-KR" dirty="0"/>
+              <a:t>.</a:t>
+            </a:r>
+          </a:p>
+          <a:p>
+            <a:r>
+              <a:rPr lang="ko-KR" altLang="en-US" dirty="0"/>
+              <a:t>또한 </a:t>
+            </a:r>
+            <a:r>
+              <a:rPr lang="ko-KR" altLang="en-US" dirty="0" err="1"/>
+              <a:t>일자별</a:t>
+            </a:r>
+            <a:r>
+              <a:rPr lang="ko-KR" altLang="en-US" dirty="0"/>
+              <a:t> 장소를 지도에 핀으로 표시해서</a:t>
+            </a:r>
+            <a:r>
+              <a:rPr lang="en-US" altLang="ko-KR" dirty="0"/>
+              <a:t>, </a:t>
+            </a:r>
+            <a:r>
+              <a:rPr lang="ko-KR" altLang="en-US" dirty="0"/>
+              <a:t>하루 동선이 너무 멀지는 </a:t>
+            </a:r>
+            <a:r>
+              <a:rPr lang="ko-KR" altLang="en-US" dirty="0" err="1"/>
+              <a:t>않은지</a:t>
+            </a:r>
+            <a:r>
+              <a:rPr lang="ko-KR" altLang="en-US" dirty="0"/>
+              <a:t> 시각적으로 확인할 수 있습니다</a:t>
+            </a:r>
+            <a:r>
+              <a:rPr lang="en-US" altLang="ko-KR" dirty="0"/>
+              <a:t>.</a:t>
+            </a:r>
+          </a:p>
+          <a:p>
+            <a:r>
+              <a:rPr lang="ko-KR" altLang="en-US" dirty="0"/>
+              <a:t>즉 단순히 장소 목록만 보여주는 것이 아니라</a:t>
+            </a:r>
+            <a:r>
+              <a:rPr lang="en-US" altLang="ko-KR" dirty="0"/>
+              <a:t>, </a:t>
+            </a:r>
+            <a:r>
+              <a:rPr lang="ko-KR" altLang="en-US" dirty="0"/>
+              <a:t>실제 이동 가능한 여행 일정으로 정리해주는 기능입니다</a:t>
+            </a:r>
+            <a:r>
+              <a:rPr lang="en-US" altLang="ko-KR" dirty="0"/>
+              <a:t>.</a:t>
             </a:r>
           </a:p>
         </p:txBody>
@@ -485,8 +784,145 @@
           <a:lstStyle/>
           <a:p>
             <a:r>
-              <a:rPr lang="en-US" dirty="0"/>
-              <a:t>네 번째 기능, 투표로 함께 정하기입니다. 장소 후보를 올리고 점수로 투표하면 실시간으로 집계됩니다. 동점이면 먼저 등록된 후보가 우선이고, Owner가 수동으로 확정할 수도 있습니다.</a:t>
+              <a:rPr lang="ko-KR" altLang="en-US" dirty="0"/>
+              <a:t>네 번째 기능은 </a:t>
+            </a:r>
+            <a:r>
+              <a:rPr lang="ko-KR" altLang="en-US" b="1" dirty="0"/>
+              <a:t>투표로 함께 </a:t>
+            </a:r>
+            <a:r>
+              <a:rPr lang="ko-KR" altLang="en-US" b="1" dirty="0" err="1"/>
+              <a:t>정하기</a:t>
+            </a:r>
+            <a:r>
+              <a:rPr lang="ko-KR" altLang="en-US" dirty="0" err="1"/>
+              <a:t>입니다</a:t>
+            </a:r>
+            <a:r>
+              <a:rPr lang="en-US" altLang="ko-KR" dirty="0"/>
+              <a:t>.</a:t>
+            </a:r>
+          </a:p>
+          <a:p>
+            <a:r>
+              <a:rPr lang="ko-KR" altLang="en-US" dirty="0"/>
+              <a:t>그룹 여행에서는 의견이 갈리는 상황이 자주 생깁니다</a:t>
+            </a:r>
+            <a:r>
+              <a:rPr lang="en-US" altLang="ko-KR" dirty="0"/>
+              <a:t>.</a:t>
+            </a:r>
+            <a:br>
+              <a:rPr lang="en-US" altLang="ko-KR" dirty="0"/>
+            </a:br>
+            <a:r>
+              <a:rPr lang="ko-KR" altLang="en-US" dirty="0"/>
+              <a:t>예를 들어 점심을 어디서 먹을지</a:t>
+            </a:r>
+            <a:r>
+              <a:rPr lang="en-US" altLang="ko-KR" dirty="0"/>
+              <a:t>, </a:t>
+            </a:r>
+            <a:r>
+              <a:rPr lang="ko-KR" altLang="en-US" dirty="0"/>
+              <a:t>어떤 장소를 먼저 갈지 같은 문제입니다</a:t>
+            </a:r>
+            <a:r>
+              <a:rPr lang="en-US" altLang="ko-KR" dirty="0"/>
+              <a:t>.</a:t>
+            </a:r>
+          </a:p>
+          <a:p>
+            <a:r>
+              <a:rPr lang="en-US" altLang="ko-KR" dirty="0" err="1"/>
+              <a:t>Groutrip</a:t>
+            </a:r>
+            <a:r>
+              <a:rPr lang="ko-KR" altLang="en-US" dirty="0"/>
+              <a:t>에서는 후보를 등록하고</a:t>
+            </a:r>
+            <a:r>
+              <a:rPr lang="en-US" altLang="ko-KR" dirty="0"/>
+              <a:t>, </a:t>
+            </a:r>
+            <a:r>
+              <a:rPr lang="ko-KR" altLang="en-US" dirty="0"/>
+              <a:t>그룹원들이 각 후보에 점수를 주는 방식으로 투표할 수 있습니다</a:t>
+            </a:r>
+            <a:r>
+              <a:rPr lang="en-US" altLang="ko-KR" dirty="0"/>
+              <a:t>.</a:t>
+            </a:r>
+          </a:p>
+          <a:p>
+            <a:r>
+              <a:rPr lang="ko-KR" altLang="en-US" dirty="0"/>
+              <a:t>투표 결과는 실시간으로 반영되며</a:t>
+            </a:r>
+            <a:r>
+              <a:rPr lang="en-US" altLang="ko-KR" dirty="0"/>
+              <a:t>, </a:t>
+            </a:r>
+            <a:r>
+              <a:rPr lang="ko-KR" altLang="en-US" dirty="0"/>
+              <a:t>가장 높은 점수를 받은 후보가 선택됩니다</a:t>
+            </a:r>
+            <a:r>
+              <a:rPr lang="en-US" altLang="ko-KR" dirty="0"/>
+              <a:t>.</a:t>
+            </a:r>
+          </a:p>
+          <a:p>
+            <a:r>
+              <a:rPr lang="ko-KR" altLang="en-US" dirty="0"/>
+              <a:t>동점이 발생할 경우에는 먼저 등록된 후보를 우선으로 처리하고</a:t>
+            </a:r>
+            <a:r>
+              <a:rPr lang="en-US" altLang="ko-KR" dirty="0"/>
+              <a:t>, </a:t>
+            </a:r>
+            <a:r>
+              <a:rPr lang="ko-KR" altLang="en-US" dirty="0"/>
+              <a:t>필요하면 </a:t>
+            </a:r>
+            <a:r>
+              <a:rPr lang="en-US" altLang="ko-KR" dirty="0"/>
+              <a:t>Owner</a:t>
+            </a:r>
+            <a:r>
+              <a:rPr lang="ko-KR" altLang="en-US" dirty="0"/>
+              <a:t>가 수동으로 확정할 수 있게 했습니다</a:t>
+            </a:r>
+            <a:r>
+              <a:rPr lang="en-US" altLang="ko-KR" dirty="0"/>
+              <a:t>.</a:t>
+            </a:r>
+          </a:p>
+          <a:p>
+            <a:r>
+              <a:rPr lang="ko-KR" altLang="en-US" dirty="0"/>
+              <a:t>이 기능을 통해 </a:t>
+            </a:r>
+            <a:r>
+              <a:rPr lang="ko-KR" altLang="en-US" dirty="0" err="1"/>
+              <a:t>단톡방에서</a:t>
+            </a:r>
+            <a:r>
+              <a:rPr lang="ko-KR" altLang="en-US" dirty="0"/>
+              <a:t> 계속 의견을 주고받는 시간을 줄이고</a:t>
+            </a:r>
+            <a:r>
+              <a:rPr lang="en-US" altLang="ko-KR" dirty="0"/>
+              <a:t>, </a:t>
+            </a:r>
+            <a:r>
+              <a:rPr lang="ko-KR" altLang="en-US" dirty="0"/>
+              <a:t>결정 과정을 명확하게 만들 수 있습니다</a:t>
+            </a:r>
+            <a:r>
+              <a:rPr lang="en-US" altLang="ko-KR" dirty="0"/>
+              <a:t>.</a:t>
             </a:r>
           </a:p>
         </p:txBody>
@@ -572,8 +1008,156 @@
           <a:lstStyle/>
           <a:p>
             <a:r>
-              <a:rPr lang="en-US" dirty="0"/>
-              <a:t>다섯 번째 기능은 정산과 송금입니다. 누가 누구에게 보낼지 최소 송금으로 계산해 거래 건수를 줄이고, 토스나 카카오페이 딥링크 또는 계좌 안내로 바로 보냅니다. 정산 시작은 Owner만 할 수 있어 안전합니다.</a:t>
+              <a:rPr lang="ko-KR" altLang="en-US" dirty="0"/>
+              <a:t>다섯 번째 기능은 </a:t>
+            </a:r>
+            <a:r>
+              <a:rPr lang="ko-KR" altLang="en-US" b="1" dirty="0"/>
+              <a:t>정산과 송금</a:t>
+            </a:r>
+            <a:r>
+              <a:rPr lang="ko-KR" altLang="en-US" dirty="0"/>
+              <a:t>입니다</a:t>
+            </a:r>
+            <a:r>
+              <a:rPr lang="en-US" altLang="ko-KR" dirty="0"/>
+              <a:t>.</a:t>
+            </a:r>
+          </a:p>
+          <a:p>
+            <a:r>
+              <a:rPr lang="ko-KR" altLang="en-US" dirty="0"/>
+              <a:t>여행에서는 한 사람이 숙소를 결제하고</a:t>
+            </a:r>
+            <a:r>
+              <a:rPr lang="en-US" altLang="ko-KR" dirty="0"/>
+              <a:t>, </a:t>
+            </a:r>
+            <a:r>
+              <a:rPr lang="ko-KR" altLang="en-US" dirty="0"/>
+              <a:t>다른 사람이 식비를 내는 식으로 지출이 섞이는 경우가 많습니다</a:t>
+            </a:r>
+            <a:r>
+              <a:rPr lang="en-US" altLang="ko-KR" dirty="0"/>
+              <a:t>.</a:t>
+            </a:r>
+          </a:p>
+          <a:p>
+            <a:r>
+              <a:rPr lang="en-US" altLang="ko-KR" dirty="0" err="1"/>
+              <a:t>Groutrip</a:t>
+            </a:r>
+            <a:r>
+              <a:rPr lang="ko-KR" altLang="en-US" dirty="0"/>
+              <a:t>에서는 총 지출액과 참여 인원을 기준으로 각자의 부담 금액을 계산합니다</a:t>
+            </a:r>
+            <a:r>
+              <a:rPr lang="en-US" altLang="ko-KR" dirty="0"/>
+              <a:t>.</a:t>
+            </a:r>
+          </a:p>
+          <a:p>
+            <a:r>
+              <a:rPr lang="ko-KR" altLang="en-US" dirty="0"/>
+              <a:t>그리고 단순히 모든 사람에게 각각 보내게 하는 것이 아니라</a:t>
+            </a:r>
+            <a:r>
+              <a:rPr lang="en-US" altLang="ko-KR" dirty="0"/>
+              <a:t>, </a:t>
+            </a:r>
+            <a:r>
+              <a:rPr lang="ko-KR" altLang="en-US" dirty="0"/>
+              <a:t>최소 송금 방식으로 누가 누구에게 얼마를 보내면 되는지 계산합니다</a:t>
+            </a:r>
+            <a:r>
+              <a:rPr lang="en-US" altLang="ko-KR" dirty="0"/>
+              <a:t>.</a:t>
+            </a:r>
+          </a:p>
+          <a:p>
+            <a:r>
+              <a:rPr lang="ko-KR" altLang="en-US" dirty="0"/>
+              <a:t>예를 들어 </a:t>
+            </a:r>
+            <a:r>
+              <a:rPr lang="en-US" altLang="ko-KR" dirty="0"/>
+              <a:t>10</a:t>
+            </a:r>
+            <a:r>
+              <a:rPr lang="ko-KR" altLang="en-US" dirty="0"/>
+              <a:t>건의 송금이 필요할 상황을 </a:t>
+            </a:r>
+            <a:r>
+              <a:rPr lang="en-US" altLang="ko-KR" dirty="0"/>
+              <a:t>3</a:t>
+            </a:r>
+            <a:r>
+              <a:rPr lang="ko-KR" altLang="en-US" dirty="0"/>
+              <a:t>건으로 줄여서</a:t>
+            </a:r>
+            <a:r>
+              <a:rPr lang="en-US" altLang="ko-KR" dirty="0"/>
+              <a:t>, </a:t>
+            </a:r>
+            <a:r>
+              <a:rPr lang="ko-KR" altLang="en-US" dirty="0"/>
+              <a:t>정산 과정을 더 간단하게 만들 수 있습니다</a:t>
+            </a:r>
+            <a:r>
+              <a:rPr lang="en-US" altLang="ko-KR" dirty="0"/>
+              <a:t>.</a:t>
+            </a:r>
+          </a:p>
+          <a:p>
+            <a:r>
+              <a:rPr lang="ko-KR" altLang="en-US" dirty="0"/>
+              <a:t>또한 토스</a:t>
+            </a:r>
+            <a:r>
+              <a:rPr lang="en-US" altLang="ko-KR" dirty="0"/>
+              <a:t>, </a:t>
+            </a:r>
+            <a:r>
+              <a:rPr lang="ko-KR" altLang="en-US" dirty="0"/>
+              <a:t>카카오페이 </a:t>
+            </a:r>
+            <a:r>
+              <a:rPr lang="ko-KR" altLang="en-US" dirty="0" err="1"/>
+              <a:t>딥링크나</a:t>
+            </a:r>
+            <a:r>
+              <a:rPr lang="ko-KR" altLang="en-US" dirty="0"/>
+              <a:t> 계좌 안내를 통해 실제 송금으로 이어질 수 있도록 구성했습니다</a:t>
+            </a:r>
+            <a:r>
+              <a:rPr lang="en-US" altLang="ko-KR" dirty="0"/>
+              <a:t>.</a:t>
+            </a:r>
+          </a:p>
+          <a:p>
+            <a:r>
+              <a:rPr lang="ko-KR" altLang="en-US" dirty="0"/>
+              <a:t>정산 시작은 </a:t>
+            </a:r>
+            <a:r>
+              <a:rPr lang="en-US" altLang="ko-KR" dirty="0"/>
+              <a:t>Owner</a:t>
+            </a:r>
+            <a:r>
+              <a:rPr lang="ko-KR" altLang="en-US" dirty="0"/>
+              <a:t>만 할 수 있게 해서</a:t>
+            </a:r>
+            <a:r>
+              <a:rPr lang="en-US" altLang="ko-KR" dirty="0"/>
+              <a:t>, </a:t>
+            </a:r>
+            <a:r>
+              <a:rPr lang="ko-KR" altLang="en-US" dirty="0"/>
+              <a:t>그룹 내 권한도 함께 고려했습니다</a:t>
+            </a:r>
+            <a:r>
+              <a:rPr lang="en-US" altLang="ko-KR" dirty="0"/>
+              <a:t>.</a:t>
             </a:r>
           </a:p>
         </p:txBody>
@@ -659,8 +1243,140 @@
           <a:lstStyle/>
           <a:p>
             <a:r>
-              <a:rPr lang="en-US" dirty="0"/>
-              <a:t>이 모든 기능을 묶어 주는 건 실시간 동기화입니다. 한 명이 투표·일정·정산을 바꾸면 SSE 스트림으로 나머지 멤버 화면에 즉시 반영되고 알림이 갑니다. 새로고침 없이 같은 화면을 봅니다.</a:t>
+              <a:rPr lang="ko-KR" altLang="en-US" dirty="0"/>
+              <a:t>앞에서 설명한 일정</a:t>
+            </a:r>
+            <a:r>
+              <a:rPr lang="en-US" altLang="ko-KR" dirty="0"/>
+              <a:t>, </a:t>
+            </a:r>
+            <a:r>
+              <a:rPr lang="ko-KR" altLang="en-US" dirty="0"/>
+              <a:t>투표</a:t>
+            </a:r>
+            <a:r>
+              <a:rPr lang="en-US" altLang="ko-KR" dirty="0"/>
+              <a:t>, </a:t>
+            </a:r>
+            <a:r>
+              <a:rPr lang="ko-KR" altLang="en-US" dirty="0"/>
+              <a:t>정산 기능은 모두 여러 명이 함께 사용하는 기능입니다</a:t>
+            </a:r>
+            <a:r>
+              <a:rPr lang="en-US" altLang="ko-KR" dirty="0"/>
+              <a:t>.</a:t>
+            </a:r>
+          </a:p>
+          <a:p>
+            <a:r>
+              <a:rPr lang="ko-KR" altLang="en-US" dirty="0"/>
+              <a:t>그래서 중요한 것이 </a:t>
+            </a:r>
+            <a:r>
+              <a:rPr lang="ko-KR" altLang="en-US" b="1" dirty="0"/>
+              <a:t>실시간 동기화</a:t>
+            </a:r>
+            <a:r>
+              <a:rPr lang="ko-KR" altLang="en-US" dirty="0"/>
+              <a:t>입니다</a:t>
+            </a:r>
+            <a:r>
+              <a:rPr lang="en-US" altLang="ko-KR" dirty="0"/>
+              <a:t>.</a:t>
+            </a:r>
+          </a:p>
+          <a:p>
+            <a:r>
+              <a:rPr lang="ko-KR" altLang="en-US" dirty="0"/>
+              <a:t>한 명이 일정을 변경하거나 투표를 하거나 정산 상태를 바꾸면</a:t>
+            </a:r>
+            <a:r>
+              <a:rPr lang="en-US" altLang="ko-KR" dirty="0"/>
+              <a:t>, </a:t>
+            </a:r>
+            <a:r>
+              <a:rPr lang="ko-KR" altLang="en-US" dirty="0"/>
+              <a:t>다른 구성원들도 같은 변경 사항을 바로 확인할 수 있어야 합니다</a:t>
+            </a:r>
+            <a:r>
+              <a:rPr lang="en-US" altLang="ko-KR" dirty="0"/>
+              <a:t>.</a:t>
+            </a:r>
+          </a:p>
+          <a:p>
+            <a:r>
+              <a:rPr lang="ko-KR" altLang="en-US" dirty="0"/>
+              <a:t>저희는 이를 위해 </a:t>
+            </a:r>
+            <a:r>
+              <a:rPr lang="en-US" altLang="ko-KR" dirty="0"/>
+              <a:t>SSE, </a:t>
+            </a:r>
+            <a:r>
+              <a:rPr lang="ko-KR" altLang="en-US" dirty="0"/>
+              <a:t>즉 </a:t>
+            </a:r>
+            <a:r>
+              <a:rPr lang="en-US" altLang="ko-KR" dirty="0"/>
+              <a:t>Server-Sent Events</a:t>
+            </a:r>
+            <a:r>
+              <a:rPr lang="ko-KR" altLang="en-US" dirty="0"/>
+              <a:t>를 사용했습니다</a:t>
+            </a:r>
+            <a:r>
+              <a:rPr lang="en-US" altLang="ko-KR" dirty="0"/>
+              <a:t>.</a:t>
+            </a:r>
+          </a:p>
+          <a:p>
+            <a:r>
+              <a:rPr lang="en-US" altLang="ko-KR" dirty="0"/>
+              <a:t>SSE</a:t>
+            </a:r>
+            <a:r>
+              <a:rPr lang="ko-KR" altLang="en-US" dirty="0"/>
+              <a:t>는 서버에서 클라이언트로 변경 사항을 실시간으로 전달하는 방식입니다</a:t>
+            </a:r>
+            <a:r>
+              <a:rPr lang="en-US" altLang="ko-KR" dirty="0"/>
+              <a:t>.</a:t>
+            </a:r>
+          </a:p>
+          <a:p>
+            <a:r>
+              <a:rPr lang="ko-KR" altLang="en-US" dirty="0"/>
+              <a:t>채팅처럼 완전한 양방향 통신이 필요한 상황보다는</a:t>
+            </a:r>
+            <a:r>
+              <a:rPr lang="en-US" altLang="ko-KR" dirty="0"/>
+              <a:t>, </a:t>
+            </a:r>
+            <a:r>
+              <a:rPr lang="ko-KR" altLang="en-US" dirty="0"/>
+              <a:t>일정 변경이나 투표 결과처럼 서버의 변경 사항을 여러 사용자에게 알려주는 데 적합하다고 판단했습니다</a:t>
+            </a:r>
+            <a:r>
+              <a:rPr lang="en-US" altLang="ko-KR" dirty="0"/>
+              <a:t>.</a:t>
+            </a:r>
+          </a:p>
+          <a:p>
+            <a:r>
+              <a:rPr lang="ko-KR" altLang="en-US" dirty="0"/>
+              <a:t>이를 통해 </a:t>
+            </a:r>
+            <a:r>
+              <a:rPr lang="ko-KR" altLang="en-US" dirty="0" err="1"/>
+              <a:t>새로고침</a:t>
+            </a:r>
+            <a:r>
+              <a:rPr lang="ko-KR" altLang="en-US" dirty="0"/>
+              <a:t> 없이도 그룹원들이 같은 여행 정보를 볼 수 있도록 했습니다</a:t>
+            </a:r>
+            <a:r>
+              <a:rPr lang="en-US" altLang="ko-KR" dirty="0"/>
+              <a:t>.</a:t>
             </a:r>
           </a:p>
         </p:txBody>
@@ -746,8 +1462,275 @@
           <a:lstStyle/>
           <a:p>
             <a:r>
-              <a:rPr lang="en-US" dirty="0"/>
-              <a:t>시스템 구조입니다. 프론트는 React와 타입스크립트, 백엔드는 스프링 부트, 데이터는 PostgreSQL입니다. 외부 인터페이스는 역할을 나눴습니다. 장소는 구글, 이동·비용과 지도는 카카오, 국내 추천은 TourAPI, 리뷰 요약은 Gemini입니다.</a:t>
+              <a:rPr lang="ko-KR" altLang="en-US" dirty="0"/>
+              <a:t>다음은 시스템 구조입니다</a:t>
+            </a:r>
+            <a:r>
+              <a:rPr lang="en-US" altLang="ko-KR" dirty="0"/>
+              <a:t>.</a:t>
+            </a:r>
+          </a:p>
+          <a:p>
+            <a:r>
+              <a:rPr lang="ko-KR" altLang="en-US" dirty="0" err="1"/>
+              <a:t>프론트엔드는</a:t>
+            </a:r>
+            <a:r>
+              <a:rPr lang="ko-KR" altLang="en-US" dirty="0"/>
+              <a:t> </a:t>
+            </a:r>
+            <a:r>
+              <a:rPr lang="en-US" altLang="ko-KR" dirty="0"/>
+              <a:t>Vue.js</a:t>
+            </a:r>
+            <a:r>
+              <a:rPr lang="ko-KR" altLang="en-US" dirty="0"/>
+              <a:t>를 사용했고</a:t>
+            </a:r>
+            <a:r>
+              <a:rPr lang="en-US" altLang="ko-KR" dirty="0"/>
+              <a:t>, </a:t>
+            </a:r>
+            <a:r>
+              <a:rPr lang="ko-KR" altLang="en-US" dirty="0" err="1"/>
+              <a:t>백엔드는</a:t>
+            </a:r>
+            <a:r>
+              <a:rPr lang="ko-KR" altLang="en-US" dirty="0"/>
+              <a:t> </a:t>
+            </a:r>
+            <a:r>
+              <a:rPr lang="en-US" altLang="ko-KR" dirty="0"/>
+              <a:t>Spring Boot</a:t>
+            </a:r>
+            <a:r>
+              <a:rPr lang="ko-KR" altLang="en-US" dirty="0"/>
+              <a:t>와 </a:t>
+            </a:r>
+            <a:r>
+              <a:rPr lang="en-US" altLang="ko-KR" dirty="0"/>
+              <a:t>Java </a:t>
+            </a:r>
+            <a:r>
+              <a:rPr lang="ko-KR" altLang="en-US" dirty="0"/>
+              <a:t>기반으로 구성했습니다</a:t>
+            </a:r>
+            <a:r>
+              <a:rPr lang="en-US" altLang="ko-KR" dirty="0"/>
+              <a:t>.</a:t>
+            </a:r>
+            <a:br>
+              <a:rPr lang="en-US" altLang="ko-KR" dirty="0"/>
+            </a:br>
+            <a:r>
+              <a:rPr lang="ko-KR" altLang="en-US" dirty="0"/>
+              <a:t>데이터베이스는 </a:t>
+            </a:r>
+            <a:r>
+              <a:rPr lang="en-US" altLang="ko-KR" dirty="0"/>
+              <a:t>PostgreSQL</a:t>
+            </a:r>
+            <a:r>
+              <a:rPr lang="ko-KR" altLang="en-US" dirty="0"/>
+              <a:t>을 사용했으며</a:t>
+            </a:r>
+            <a:r>
+              <a:rPr lang="en-US" altLang="ko-KR" dirty="0"/>
+              <a:t>, JPA</a:t>
+            </a:r>
+            <a:r>
+              <a:rPr lang="ko-KR" altLang="en-US" dirty="0"/>
+              <a:t>를 통해 데이터를 관리했습니다</a:t>
+            </a:r>
+            <a:r>
+              <a:rPr lang="en-US" altLang="ko-KR" dirty="0"/>
+              <a:t>.</a:t>
+            </a:r>
+          </a:p>
+          <a:p>
+            <a:r>
+              <a:rPr lang="ko-KR" altLang="en-US" dirty="0"/>
+              <a:t>서비스는 </a:t>
+            </a:r>
+            <a:r>
+              <a:rPr lang="en-US" altLang="ko-KR" dirty="0"/>
+              <a:t>REST API</a:t>
+            </a:r>
+            <a:r>
+              <a:rPr lang="ko-KR" altLang="en-US" dirty="0"/>
+              <a:t>를 통해 기본 데이터를 주고받고</a:t>
+            </a:r>
+            <a:r>
+              <a:rPr lang="en-US" altLang="ko-KR" dirty="0"/>
+              <a:t>, </a:t>
+            </a:r>
+            <a:r>
+              <a:rPr lang="ko-KR" altLang="en-US" dirty="0"/>
+              <a:t>실시간 변경 사항은 </a:t>
+            </a:r>
+            <a:r>
+              <a:rPr lang="en-US" altLang="ko-KR" dirty="0"/>
+              <a:t>SSE</a:t>
+            </a:r>
+            <a:r>
+              <a:rPr lang="ko-KR" altLang="en-US" dirty="0"/>
+              <a:t>를 통해 전달합니다</a:t>
+            </a:r>
+            <a:r>
+              <a:rPr lang="en-US" altLang="ko-KR" dirty="0"/>
+              <a:t>.</a:t>
+            </a:r>
+          </a:p>
+          <a:p>
+            <a:r>
+              <a:rPr lang="ko-KR" altLang="en-US" dirty="0"/>
+              <a:t>외부 </a:t>
+            </a:r>
+            <a:r>
+              <a:rPr lang="en-US" altLang="ko-KR" dirty="0"/>
+              <a:t>API</a:t>
+            </a:r>
+            <a:r>
+              <a:rPr lang="ko-KR" altLang="en-US" dirty="0"/>
+              <a:t>는 역할을 나누어 사용했습니다</a:t>
+            </a:r>
+            <a:r>
+              <a:rPr lang="en-US" altLang="ko-KR" dirty="0"/>
+              <a:t>.</a:t>
+            </a:r>
+          </a:p>
+          <a:p>
+            <a:r>
+              <a:rPr lang="ko-KR" altLang="en-US" dirty="0"/>
+              <a:t>장소 검색과 장소 정보</a:t>
+            </a:r>
+            <a:r>
+              <a:rPr lang="en-US" altLang="ko-KR" dirty="0"/>
+              <a:t>, </a:t>
+            </a:r>
+            <a:r>
+              <a:rPr lang="ko-KR" altLang="en-US" dirty="0"/>
+              <a:t>사진은 </a:t>
+            </a:r>
+            <a:r>
+              <a:rPr lang="en-US" altLang="ko-KR" dirty="0"/>
+              <a:t>Google Places</a:t>
+            </a:r>
+            <a:r>
+              <a:rPr lang="ko-KR" altLang="en-US" dirty="0"/>
+              <a:t>를 사용했습니다</a:t>
+            </a:r>
+            <a:r>
+              <a:rPr lang="en-US" altLang="ko-KR" dirty="0"/>
+              <a:t>.</a:t>
+            </a:r>
+            <a:br>
+              <a:rPr lang="en-US" altLang="ko-KR" dirty="0"/>
+            </a:br>
+            <a:r>
+              <a:rPr lang="ko-KR" altLang="en-US" dirty="0"/>
+              <a:t>이동 시간</a:t>
+            </a:r>
+            <a:r>
+              <a:rPr lang="en-US" altLang="ko-KR" dirty="0"/>
+              <a:t>, </a:t>
+            </a:r>
+            <a:r>
+              <a:rPr lang="ko-KR" altLang="en-US" dirty="0"/>
+              <a:t>이동 비용</a:t>
+            </a:r>
+            <a:r>
+              <a:rPr lang="en-US" altLang="ko-KR" dirty="0"/>
+              <a:t>, </a:t>
+            </a:r>
+            <a:r>
+              <a:rPr lang="ko-KR" altLang="en-US" dirty="0"/>
+              <a:t>지도 표시는 </a:t>
+            </a:r>
+            <a:r>
+              <a:rPr lang="en-US" altLang="ko-KR" dirty="0" err="1"/>
+              <a:t>Kakao</a:t>
+            </a:r>
+            <a:r>
+              <a:rPr lang="en-US" altLang="ko-KR" dirty="0"/>
+              <a:t> API</a:t>
+            </a:r>
+            <a:r>
+              <a:rPr lang="ko-KR" altLang="en-US" dirty="0"/>
+              <a:t>를 활용했습니다</a:t>
+            </a:r>
+            <a:r>
+              <a:rPr lang="en-US" altLang="ko-KR" dirty="0"/>
+              <a:t>.</a:t>
+            </a:r>
+            <a:br>
+              <a:rPr lang="en-US" altLang="ko-KR" dirty="0"/>
+            </a:br>
+            <a:r>
+              <a:rPr lang="ko-KR" altLang="en-US" dirty="0"/>
+              <a:t>국내 관광지 추천은 </a:t>
+            </a:r>
+            <a:r>
+              <a:rPr lang="en-US" altLang="ko-KR" dirty="0" err="1"/>
+              <a:t>TourAPI</a:t>
+            </a:r>
+            <a:r>
+              <a:rPr lang="ko-KR" altLang="en-US" dirty="0"/>
+              <a:t>를 활용했고</a:t>
+            </a:r>
+            <a:r>
+              <a:rPr lang="en-US" altLang="ko-KR" dirty="0"/>
+              <a:t>, </a:t>
+            </a:r>
+            <a:r>
+              <a:rPr lang="ko-KR" altLang="en-US" dirty="0"/>
+              <a:t>리뷰 요약은 </a:t>
+            </a:r>
+            <a:r>
+              <a:rPr lang="en-US" altLang="ko-KR" dirty="0"/>
+              <a:t>Gemini</a:t>
+            </a:r>
+            <a:r>
+              <a:rPr lang="ko-KR" altLang="en-US" dirty="0"/>
+              <a:t>를 사용했습니다</a:t>
+            </a:r>
+            <a:r>
+              <a:rPr lang="en-US" altLang="ko-KR" dirty="0"/>
+              <a:t>.</a:t>
+            </a:r>
+          </a:p>
+          <a:p>
+            <a:r>
+              <a:rPr lang="ko-KR" altLang="en-US" dirty="0"/>
+              <a:t>즉 하나의 </a:t>
+            </a:r>
+            <a:r>
+              <a:rPr lang="en-US" altLang="ko-KR" dirty="0"/>
+              <a:t>API</a:t>
+            </a:r>
+            <a:r>
+              <a:rPr lang="ko-KR" altLang="en-US" dirty="0"/>
+              <a:t>에 모든 기능을 의존하기보다</a:t>
+            </a:r>
+            <a:r>
+              <a:rPr lang="en-US" altLang="ko-KR" dirty="0"/>
+              <a:t>, </a:t>
+            </a:r>
+            <a:r>
+              <a:rPr lang="ko-KR" altLang="en-US" dirty="0"/>
+              <a:t>각 </a:t>
+            </a:r>
+            <a:r>
+              <a:rPr lang="en-US" altLang="ko-KR" dirty="0"/>
+              <a:t>API</a:t>
+            </a:r>
+            <a:r>
+              <a:rPr lang="ko-KR" altLang="en-US" dirty="0"/>
+              <a:t>가 잘하는 역할에 맞게 분리해 연동했습니다</a:t>
+            </a:r>
+            <a:r>
+              <a:rPr lang="en-US" altLang="ko-KR" dirty="0"/>
+              <a:t>.</a:t>
             </a:r>
           </a:p>
         </p:txBody>
@@ -833,8 +1816,195 @@
           <a:lstStyle/>
           <a:p>
             <a:r>
-              <a:rPr lang="en-US" dirty="0"/>
-              <a:t>기술 스택입니다. 백엔드는 스프링 부트 4와 자바 21, 프론트는 React와 타입스크립트입니다. 보안은 특히 신경 썼습니다. JWT와 OAuth2 로그인, 권한은 AOP로 처리하고, 민감한 계좌번호는 AES-GCM으로 암호화해 저장합니다. 스키마는 Flyway로 관리합니다.</a:t>
+              <a:rPr lang="ko-KR" altLang="en-US" dirty="0"/>
+              <a:t>기술 스택과 보안입니다</a:t>
+            </a:r>
+            <a:r>
+              <a:rPr lang="en-US" altLang="ko-KR" dirty="0"/>
+              <a:t>.</a:t>
+            </a:r>
+          </a:p>
+          <a:p>
+            <a:r>
+              <a:rPr lang="ko-KR" altLang="en-US" dirty="0" err="1"/>
+              <a:t>백엔드는</a:t>
+            </a:r>
+            <a:r>
+              <a:rPr lang="ko-KR" altLang="en-US" dirty="0"/>
+              <a:t> </a:t>
+            </a:r>
+            <a:r>
+              <a:rPr lang="en-US" altLang="ko-KR" dirty="0"/>
+              <a:t>Spring Boot, Java 21, Spring Data JPA</a:t>
+            </a:r>
+            <a:r>
+              <a:rPr lang="ko-KR" altLang="en-US" dirty="0"/>
+              <a:t>를 사용했고</a:t>
+            </a:r>
+            <a:r>
+              <a:rPr lang="en-US" altLang="ko-KR" dirty="0"/>
+              <a:t>, </a:t>
+            </a:r>
+            <a:r>
+              <a:rPr lang="ko-KR" altLang="en-US" dirty="0"/>
+              <a:t>데이터베이스는 </a:t>
+            </a:r>
+            <a:r>
+              <a:rPr lang="en-US" altLang="ko-KR" dirty="0"/>
+              <a:t>PostgreSQL</a:t>
+            </a:r>
+            <a:r>
+              <a:rPr lang="ko-KR" altLang="en-US" dirty="0"/>
+              <a:t>을 사용했습니다</a:t>
+            </a:r>
+            <a:r>
+              <a:rPr lang="en-US" altLang="ko-KR" dirty="0"/>
+              <a:t>.</a:t>
+            </a:r>
+          </a:p>
+          <a:p>
+            <a:r>
+              <a:rPr lang="ko-KR" altLang="en-US" dirty="0" err="1"/>
+              <a:t>프론트엔드는</a:t>
+            </a:r>
+            <a:r>
+              <a:rPr lang="ko-KR" altLang="en-US" dirty="0"/>
+              <a:t> </a:t>
+            </a:r>
+            <a:r>
+              <a:rPr lang="en-US" altLang="ko-KR" dirty="0"/>
+              <a:t>Vue.js</a:t>
+            </a:r>
+            <a:r>
+              <a:rPr lang="ko-KR" altLang="en-US" dirty="0"/>
+              <a:t>를 사용했습니다</a:t>
+            </a:r>
+            <a:r>
+              <a:rPr lang="en-US" altLang="ko-KR" dirty="0"/>
+              <a:t>.</a:t>
+            </a:r>
+          </a:p>
+          <a:p>
+            <a:r>
+              <a:rPr lang="ko-KR" altLang="en-US" dirty="0"/>
+              <a:t>인프라와 데이터 관리 측면에서는 </a:t>
+            </a:r>
+            <a:r>
+              <a:rPr lang="en-US" altLang="ko-KR" dirty="0"/>
+              <a:t>Docker</a:t>
+            </a:r>
+            <a:r>
+              <a:rPr lang="ko-KR" altLang="en-US" dirty="0"/>
+              <a:t>를 활용해 실행 환경을 구성했고</a:t>
+            </a:r>
+            <a:r>
+              <a:rPr lang="en-US" altLang="ko-KR" dirty="0"/>
+              <a:t>, Flyway</a:t>
+            </a:r>
+            <a:r>
+              <a:rPr lang="ko-KR" altLang="en-US" dirty="0"/>
+              <a:t>를 통해 데이터베이스 스키마 변경 이력을 관리했습니다</a:t>
+            </a:r>
+            <a:r>
+              <a:rPr lang="en-US" altLang="ko-KR" dirty="0"/>
+              <a:t>.</a:t>
+            </a:r>
+          </a:p>
+          <a:p>
+            <a:r>
+              <a:rPr lang="ko-KR" altLang="en-US" dirty="0"/>
+              <a:t>보안 측면에서는 </a:t>
+            </a:r>
+            <a:r>
+              <a:rPr lang="en-US" altLang="ko-KR" dirty="0"/>
+              <a:t>JWT</a:t>
+            </a:r>
+            <a:r>
+              <a:rPr lang="ko-KR" altLang="en-US" dirty="0"/>
+              <a:t>와 </a:t>
+            </a:r>
+            <a:r>
+              <a:rPr lang="en-US" altLang="ko-KR" dirty="0"/>
+              <a:t>OAuth2</a:t>
+            </a:r>
+            <a:r>
+              <a:rPr lang="ko-KR" altLang="en-US" dirty="0"/>
+              <a:t>를 활용해 인증 흐름을 구성했습니다</a:t>
+            </a:r>
+            <a:r>
+              <a:rPr lang="en-US" altLang="ko-KR" dirty="0"/>
+              <a:t>.</a:t>
+            </a:r>
+          </a:p>
+          <a:p>
+            <a:r>
+              <a:rPr lang="ko-KR" altLang="en-US" dirty="0"/>
+              <a:t>또한 그룹마다 </a:t>
+            </a:r>
+            <a:r>
+              <a:rPr lang="en-US" altLang="ko-KR" dirty="0"/>
+              <a:t>Owner</a:t>
+            </a:r>
+            <a:r>
+              <a:rPr lang="ko-KR" altLang="en-US" dirty="0"/>
+              <a:t>와 일반 멤버의 권한이 다르기 때문에</a:t>
+            </a:r>
+            <a:r>
+              <a:rPr lang="en-US" altLang="ko-KR" dirty="0"/>
+              <a:t>, </a:t>
+            </a:r>
+            <a:r>
+              <a:rPr lang="ko-KR" altLang="en-US" dirty="0"/>
+              <a:t>권한 검증 로직을 </a:t>
+            </a:r>
+            <a:r>
+              <a:rPr lang="en-US" altLang="ko-KR" dirty="0"/>
+              <a:t>AOP</a:t>
+            </a:r>
+            <a:r>
+              <a:rPr lang="ko-KR" altLang="en-US" dirty="0"/>
+              <a:t>로 분리했습니다</a:t>
+            </a:r>
+            <a:r>
+              <a:rPr lang="en-US" altLang="ko-KR" dirty="0"/>
+              <a:t>.</a:t>
+            </a:r>
+            <a:br>
+              <a:rPr lang="en-US" altLang="ko-KR" dirty="0"/>
+            </a:br>
+            <a:r>
+              <a:rPr lang="ko-KR" altLang="en-US" dirty="0"/>
+              <a:t>이를 통해 컨트롤러나 서비스마다 반복적으로 권한 체크 코드를 작성하지 않고</a:t>
+            </a:r>
+            <a:r>
+              <a:rPr lang="en-US" altLang="ko-KR" dirty="0"/>
+              <a:t>, </a:t>
+            </a:r>
+            <a:r>
+              <a:rPr lang="ko-KR" altLang="en-US" dirty="0"/>
+              <a:t>공통 관심사로 관리할 수 있었습니다</a:t>
+            </a:r>
+            <a:r>
+              <a:rPr lang="en-US" altLang="ko-KR" dirty="0"/>
+              <a:t>.</a:t>
+            </a:r>
+          </a:p>
+          <a:p>
+            <a:r>
+              <a:rPr lang="ko-KR" altLang="en-US" dirty="0"/>
+              <a:t>정산 기능에서는 계좌번호와 같은 민감한 정보가 포함될 수 있기 때문에</a:t>
+            </a:r>
+            <a:r>
+              <a:rPr lang="en-US" altLang="ko-KR" dirty="0"/>
+              <a:t>, AES-GCM </a:t>
+            </a:r>
+            <a:r>
+              <a:rPr lang="ko-KR" altLang="en-US" dirty="0"/>
+              <a:t>방식으로 암호화해 저장하도록 설계했습니다</a:t>
+            </a:r>
+            <a:r>
+              <a:rPr lang="en-US" altLang="ko-KR" dirty="0"/>
+              <a:t>.</a:t>
             </a:r>
           </a:p>
         </p:txBody>
@@ -920,8 +2090,185 @@
           <a:lstStyle/>
           <a:p>
             <a:r>
-              <a:rPr lang="en-US" dirty="0"/>
-              <a:t>마지막으로 회고와 향후 계획입니다. 실시간 동기화 설계와 외부 API 통합, 둘이서의 Git 협업을 배웠습니다. 앞으로는 해외 여행 지원, AI 코스 추천 고도화, 모바일 앱을 계획하고 있습니다. 들어 주셔서 감사합니다. 질문 받겠습니다.</a:t>
+              <a:rPr lang="ko-KR" altLang="en-US" dirty="0"/>
+              <a:t>마지막으로 회고와 향후 계획입니다</a:t>
+            </a:r>
+            <a:r>
+              <a:rPr lang="en-US" altLang="ko-KR" dirty="0"/>
+              <a:t>.</a:t>
+            </a:r>
+          </a:p>
+          <a:p>
+            <a:r>
+              <a:rPr lang="ko-KR" altLang="en-US" dirty="0"/>
+              <a:t>저희 팀은 </a:t>
+            </a:r>
+            <a:r>
+              <a:rPr lang="ko-KR" altLang="en-US" dirty="0" err="1"/>
+              <a:t>백엔드와</a:t>
+            </a:r>
+            <a:r>
+              <a:rPr lang="ko-KR" altLang="en-US" dirty="0"/>
+              <a:t> 프론트를 완전히 나누기보다는</a:t>
+            </a:r>
+            <a:r>
+              <a:rPr lang="en-US" altLang="ko-KR" dirty="0"/>
+              <a:t>, </a:t>
+            </a:r>
+            <a:r>
+              <a:rPr lang="ko-KR" altLang="en-US" dirty="0"/>
+              <a:t>학습을 위해서</a:t>
+            </a:r>
+            <a:r>
+              <a:rPr lang="en-US" altLang="ko-KR" dirty="0"/>
+              <a:t> </a:t>
+            </a:r>
+            <a:r>
+              <a:rPr lang="ko-KR" altLang="en-US" dirty="0"/>
+              <a:t>도메인 단위로 역할을 나누어 개발했습니다</a:t>
+            </a:r>
+            <a:r>
+              <a:rPr lang="en-US" altLang="ko-KR" dirty="0"/>
+              <a:t>.</a:t>
+            </a:r>
+          </a:p>
+          <a:p>
+            <a:r>
+              <a:rPr lang="ko-KR" altLang="en-US" dirty="0"/>
+              <a:t>저는 그룹</a:t>
+            </a:r>
+            <a:r>
+              <a:rPr lang="en-US" altLang="ko-KR" dirty="0"/>
+              <a:t>, </a:t>
+            </a:r>
+            <a:r>
+              <a:rPr lang="ko-KR" altLang="en-US" dirty="0"/>
+              <a:t>일정</a:t>
+            </a:r>
+            <a:r>
+              <a:rPr lang="en-US" altLang="ko-KR" dirty="0"/>
+              <a:t>, </a:t>
+            </a:r>
+            <a:r>
+              <a:rPr lang="ko-KR" altLang="en-US" dirty="0"/>
+              <a:t>실시간 동기화 기능을 중심으로 담당했고</a:t>
+            </a:r>
+            <a:r>
+              <a:rPr lang="en-US" altLang="ko-KR" dirty="0"/>
+              <a:t>,</a:t>
+            </a:r>
+            <a:br>
+              <a:rPr lang="en-US" altLang="ko-KR" dirty="0"/>
+            </a:br>
+            <a:r>
+              <a:rPr lang="ko-KR" altLang="en-US" dirty="0"/>
+              <a:t>정희성은 장소</a:t>
+            </a:r>
+            <a:r>
+              <a:rPr lang="en-US" altLang="ko-KR" dirty="0"/>
+              <a:t>, </a:t>
+            </a:r>
+            <a:r>
+              <a:rPr lang="ko-KR" altLang="en-US" dirty="0"/>
+              <a:t>투표</a:t>
+            </a:r>
+            <a:r>
+              <a:rPr lang="en-US" altLang="ko-KR" dirty="0"/>
+              <a:t>, </a:t>
+            </a:r>
+            <a:r>
+              <a:rPr lang="ko-KR" altLang="en-US" dirty="0"/>
+              <a:t>정산</a:t>
+            </a:r>
+            <a:r>
+              <a:rPr lang="en-US" altLang="ko-KR" dirty="0"/>
+              <a:t>, </a:t>
+            </a:r>
+            <a:r>
+              <a:rPr lang="ko-KR" altLang="en-US" dirty="0"/>
+              <a:t>페르소나 기능을 중심으로 담당했습니다</a:t>
+            </a:r>
+            <a:r>
+              <a:rPr lang="en-US" altLang="ko-KR" dirty="0"/>
+              <a:t>.</a:t>
+            </a:r>
+          </a:p>
+          <a:p>
+            <a:r>
+              <a:rPr lang="ko-KR" altLang="en-US" dirty="0"/>
+              <a:t>이 방식은 기능 단위로 책임을 나눌 수 있어서 충돌을 줄이는 데 도움이 되었습니다</a:t>
+            </a:r>
+            <a:r>
+              <a:rPr lang="en-US" altLang="ko-KR" dirty="0"/>
+              <a:t>.</a:t>
+            </a:r>
+          </a:p>
+          <a:p>
+            <a:r>
+              <a:rPr lang="ko-KR" altLang="en-US" dirty="0"/>
+              <a:t>이번 프로젝트를 통해 </a:t>
+            </a:r>
+            <a:r>
+              <a:rPr lang="en-US" altLang="ko-KR" dirty="0"/>
+              <a:t>SSE </a:t>
+            </a:r>
+            <a:r>
+              <a:rPr lang="ko-KR" altLang="en-US" dirty="0"/>
+              <a:t>기반 실시간 설계</a:t>
+            </a:r>
+            <a:r>
+              <a:rPr lang="en-US" altLang="ko-KR" dirty="0"/>
+              <a:t>, </a:t>
+            </a:r>
+            <a:r>
+              <a:rPr lang="ko-KR" altLang="en-US" dirty="0"/>
+              <a:t>외부 </a:t>
+            </a:r>
+            <a:r>
+              <a:rPr lang="en-US" altLang="ko-KR" dirty="0"/>
+              <a:t>API </a:t>
+            </a:r>
+            <a:r>
+              <a:rPr lang="ko-KR" altLang="en-US" dirty="0"/>
+              <a:t>통합</a:t>
+            </a:r>
+            <a:r>
+              <a:rPr lang="en-US" altLang="ko-KR" dirty="0"/>
+              <a:t>, </a:t>
+            </a:r>
+            <a:r>
+              <a:rPr lang="ko-KR" altLang="en-US" dirty="0"/>
+              <a:t>그리고 도메인 단위 협업 방식을 경험할 수 있었습니다</a:t>
+            </a:r>
+            <a:r>
+              <a:rPr lang="en-US" altLang="ko-KR" dirty="0"/>
+              <a:t>.</a:t>
+            </a:r>
+          </a:p>
+          <a:p>
+            <a:r>
+              <a:rPr lang="ko-KR" altLang="en-US" dirty="0"/>
+              <a:t>향후에는 해외 여행 지원</a:t>
+            </a:r>
+            <a:r>
+              <a:rPr lang="en-US" altLang="ko-KR" dirty="0"/>
+              <a:t>, AI </a:t>
+            </a:r>
+            <a:r>
+              <a:rPr lang="ko-KR" altLang="en-US" dirty="0"/>
+              <a:t>코스 추천 고도화</a:t>
+            </a:r>
+            <a:r>
+              <a:rPr lang="en-US" altLang="ko-KR" dirty="0"/>
+              <a:t>, </a:t>
+            </a:r>
+            <a:r>
+              <a:rPr lang="ko-KR" altLang="en-US" dirty="0"/>
+              <a:t>모바일 앱 출시까지 확장해보고 싶습니다</a:t>
+            </a:r>
+            <a:r>
+              <a:rPr lang="en-US" altLang="ko-KR" dirty="0"/>
+              <a:t>.</a:t>
             </a:r>
           </a:p>
         </p:txBody>
@@ -1007,9 +2354,14 @@
           <a:lstStyle/>
           <a:p>
             <a:r>
-              <a:rPr lang="en-US" dirty="0"/>
-              <a:t>Groutrip은 국내 여행에 특화된 그룹 여행 협업 플랫폼입니다. 해외 서비스 Wanderlog를 벤치마크했고, 2인이 개발했습니다. 핵심 가치는 흩어진 단톡방 여행 계획을 한 장의 티켓으로 모으는 것입니다.</a:t>
-            </a:r>
+              <a:rPr lang="ko-KR" altLang="en-US" dirty="0"/>
+              <a:t>지금부터는 실제 사용 흐름을 기준으로 짧게 시연하겠습니다</a:t>
+            </a:r>
+            <a:r>
+              <a:rPr lang="en-US" altLang="ko-KR" dirty="0"/>
+              <a:t>.</a:t>
+            </a:r>
+            <a:endParaRPr lang="en-US" dirty="0"/>
           </a:p>
         </p:txBody>
       </p:sp>
@@ -1094,9 +2446,14 @@
           <a:lstStyle/>
           <a:p>
             <a:r>
-              <a:rPr lang="en-US" dirty="0"/>
-              <a:t>Groutrip은 국내 여행에 특화된 그룹 여행 협업 플랫폼입니다. 해외 서비스 Wanderlog를 벤치마크했고, 2인이 개발했습니다. 핵심 가치는 흩어진 단톡방 여행 계획을 한 장의 티켓으로 모으는 것입니다.</a:t>
-            </a:r>
+              <a:rPr lang="ko-KR" altLang="en-US" dirty="0"/>
+              <a:t>이상으로 발표를 마치겠습니다</a:t>
+            </a:r>
+            <a:r>
+              <a:rPr lang="en-US" altLang="ko-KR" dirty="0"/>
+              <a:t>.</a:t>
+            </a:r>
+            <a:endParaRPr lang="en-US" dirty="0"/>
           </a:p>
         </p:txBody>
       </p:sp>
@@ -1181,8 +2538,97 @@
           <a:lstStyle/>
           <a:p>
             <a:r>
-              <a:rPr lang="en-US" dirty="0"/>
-              <a:t>오늘 발표 순서입니다. 개요, 문제, 솔루션, 다섯 가지 기능 시연, 그리고 기술과 회고 순으로 진행합니다.</a:t>
+              <a:rPr lang="ko-KR" altLang="en-US" dirty="0"/>
+              <a:t>오늘 발표는 다음 순서로 진행하겠습니다</a:t>
+            </a:r>
+            <a:r>
+              <a:rPr lang="en-US" altLang="ko-KR" dirty="0"/>
+              <a:t>.</a:t>
+            </a:r>
+          </a:p>
+          <a:p>
+            <a:r>
+              <a:rPr lang="ko-KR" altLang="en-US" dirty="0"/>
+              <a:t>먼저 저희가 어떤 서비스를 만들었는지 프로젝트 개요를 </a:t>
+            </a:r>
+            <a:r>
+              <a:rPr lang="ko-KR" altLang="en-US" dirty="0" err="1"/>
+              <a:t>소개드리고</a:t>
+            </a:r>
+            <a:r>
+              <a:rPr lang="en-US" altLang="ko-KR" dirty="0"/>
+              <a:t>,</a:t>
+            </a:r>
+            <a:br>
+              <a:rPr lang="en-US" altLang="ko-KR" dirty="0"/>
+            </a:br>
+            <a:r>
+              <a:rPr lang="ko-KR" altLang="en-US" dirty="0" err="1"/>
+              <a:t>그다음</a:t>
+            </a:r>
+            <a:r>
+              <a:rPr lang="ko-KR" altLang="en-US" dirty="0"/>
+              <a:t> 그룹 여행에서 어떤 문제가 있다고 생각했는지 말씀드리겠습니다</a:t>
+            </a:r>
+            <a:r>
+              <a:rPr lang="en-US" altLang="ko-KR" dirty="0"/>
+              <a:t>.</a:t>
+            </a:r>
+          </a:p>
+          <a:p>
+            <a:r>
+              <a:rPr lang="ko-KR" altLang="en-US" dirty="0"/>
+              <a:t>이후 </a:t>
+            </a:r>
+            <a:r>
+              <a:rPr lang="en-US" altLang="ko-KR" dirty="0" err="1"/>
+              <a:t>Groutrip</a:t>
+            </a:r>
+            <a:r>
+              <a:rPr lang="ko-KR" altLang="en-US" dirty="0"/>
+              <a:t>이 그 문제를 어떻게 해결하는지</a:t>
+            </a:r>
+            <a:r>
+              <a:rPr lang="en-US" altLang="ko-KR" dirty="0"/>
+              <a:t>, </a:t>
+            </a:r>
+            <a:r>
+              <a:rPr lang="ko-KR" altLang="en-US" dirty="0"/>
+              <a:t>그리고 핵심 기능 다섯 가지를 </a:t>
+            </a:r>
+            <a:r>
+              <a:rPr lang="ko-KR" altLang="en-US" dirty="0" err="1"/>
+              <a:t>설명드리겠습니다</a:t>
+            </a:r>
+            <a:r>
+              <a:rPr lang="en-US" altLang="ko-KR" dirty="0"/>
+              <a:t>.</a:t>
+            </a:r>
+          </a:p>
+          <a:p>
+            <a:r>
+              <a:rPr lang="ko-KR" altLang="en-US" dirty="0"/>
+              <a:t>마지막으로 기술 구조와 보안</a:t>
+            </a:r>
+            <a:r>
+              <a:rPr lang="en-US" altLang="ko-KR" dirty="0"/>
+              <a:t>, </a:t>
+            </a:r>
+            <a:r>
+              <a:rPr lang="ko-KR" altLang="en-US" dirty="0"/>
+              <a:t>개발 과정에서 배운 점을 말씀드린 뒤</a:t>
+            </a:r>
+            <a:r>
+              <a:rPr lang="en-US" altLang="ko-KR" dirty="0"/>
+              <a:t>, </a:t>
+            </a:r>
+            <a:r>
+              <a:rPr lang="ko-KR" altLang="en-US" dirty="0"/>
+              <a:t>시연으로 마무리하겠습니다</a:t>
+            </a:r>
+            <a:r>
+              <a:rPr lang="en-US" altLang="ko-KR" dirty="0"/>
+              <a:t>.</a:t>
             </a:r>
           </a:p>
         </p:txBody>
@@ -1268,8 +2714,156 @@
           <a:lstStyle/>
           <a:p>
             <a:r>
-              <a:rPr lang="en-US" dirty="0"/>
-              <a:t>Groutrip은 국내 여행에 특화된 그룹 여행 협업 플랫폼입니다. 해외 서비스 Wanderlog를 벤치마크했고, 2인이 개발했습니다. 핵심 가치는 흩어진 단톡방 여행 계획을 한 장의 티켓으로 모으는 것입니다.</a:t>
+              <a:rPr lang="en-US" altLang="ko-KR" dirty="0" err="1"/>
+              <a:t>Groutrip</a:t>
+            </a:r>
+            <a:r>
+              <a:rPr lang="ko-KR" altLang="en-US" dirty="0"/>
+              <a:t>은 국내 여행에 특화된 그룹 여행 협업 플랫폼입니다</a:t>
+            </a:r>
+            <a:r>
+              <a:rPr lang="en-US" altLang="ko-KR" dirty="0"/>
+              <a:t>.</a:t>
+            </a:r>
+          </a:p>
+          <a:p>
+            <a:r>
+              <a:rPr lang="ko-KR" altLang="en-US" dirty="0"/>
+              <a:t>여러 명이 함께 여행을 준비할 때 필요한 장소 저장</a:t>
+            </a:r>
+            <a:r>
+              <a:rPr lang="en-US" altLang="ko-KR" dirty="0"/>
+              <a:t>, </a:t>
+            </a:r>
+            <a:r>
+              <a:rPr lang="ko-KR" altLang="en-US" dirty="0"/>
+              <a:t>일정 구성</a:t>
+            </a:r>
+            <a:r>
+              <a:rPr lang="en-US" altLang="ko-KR" dirty="0"/>
+              <a:t>, </a:t>
+            </a:r>
+            <a:r>
+              <a:rPr lang="ko-KR" altLang="en-US" dirty="0"/>
+              <a:t>투표</a:t>
+            </a:r>
+            <a:r>
+              <a:rPr lang="en-US" altLang="ko-KR" dirty="0"/>
+              <a:t>, </a:t>
+            </a:r>
+            <a:r>
+              <a:rPr lang="ko-KR" altLang="en-US" dirty="0"/>
+              <a:t>정산 기능을 하나로 묶는 것을 목표로 했습니다</a:t>
+            </a:r>
+            <a:r>
+              <a:rPr lang="en-US" altLang="ko-KR" dirty="0"/>
+              <a:t>.</a:t>
+            </a:r>
+          </a:p>
+          <a:p>
+            <a:r>
+              <a:rPr lang="ko-KR" altLang="en-US" dirty="0"/>
+              <a:t>저희는 해외 여행 일정 협업 서비스인 </a:t>
+            </a:r>
+            <a:r>
+              <a:rPr lang="en-US" altLang="ko-KR" dirty="0" err="1"/>
+              <a:t>Wanderlog</a:t>
+            </a:r>
+            <a:r>
+              <a:rPr lang="ko-KR" altLang="en-US" dirty="0"/>
+              <a:t>를 </a:t>
+            </a:r>
+            <a:r>
+              <a:rPr lang="ko-KR" altLang="en-US" dirty="0" err="1"/>
+              <a:t>벤치마크했습니다</a:t>
+            </a:r>
+            <a:r>
+              <a:rPr lang="en-US" altLang="ko-KR" dirty="0"/>
+              <a:t>.</a:t>
+            </a:r>
+            <a:br>
+              <a:rPr lang="en-US" altLang="ko-KR" dirty="0"/>
+            </a:br>
+            <a:r>
+              <a:rPr lang="ko-KR" altLang="en-US" dirty="0"/>
+              <a:t>다만 </a:t>
+            </a:r>
+            <a:r>
+              <a:rPr lang="en-US" altLang="ko-KR" dirty="0" err="1"/>
+              <a:t>Wanderlog</a:t>
+            </a:r>
+            <a:r>
+              <a:rPr lang="ko-KR" altLang="en-US" dirty="0"/>
+              <a:t>가 비교적 해외 여행 중심이라면</a:t>
+            </a:r>
+            <a:r>
+              <a:rPr lang="en-US" altLang="ko-KR" dirty="0"/>
+              <a:t>, </a:t>
+            </a:r>
+            <a:r>
+              <a:rPr lang="en-US" altLang="ko-KR" dirty="0" err="1"/>
+              <a:t>Groutrip</a:t>
+            </a:r>
+            <a:r>
+              <a:rPr lang="ko-KR" altLang="en-US" dirty="0"/>
+              <a:t>은 국내 사용자에게 익숙한 지도</a:t>
+            </a:r>
+            <a:r>
+              <a:rPr lang="en-US" altLang="ko-KR" dirty="0"/>
+              <a:t>, </a:t>
+            </a:r>
+            <a:r>
+              <a:rPr lang="ko-KR" altLang="en-US" dirty="0"/>
+              <a:t>장소 추천</a:t>
+            </a:r>
+            <a:r>
+              <a:rPr lang="en-US" altLang="ko-KR" dirty="0"/>
+              <a:t>, </a:t>
+            </a:r>
+            <a:r>
+              <a:rPr lang="ko-KR" altLang="en-US" dirty="0"/>
+              <a:t>정산 흐름에 더 초점을 맞췄습니다</a:t>
+            </a:r>
+            <a:r>
+              <a:rPr lang="en-US" altLang="ko-KR" dirty="0"/>
+              <a:t>.</a:t>
+            </a:r>
+          </a:p>
+          <a:p>
+            <a:r>
+              <a:rPr lang="ko-KR" altLang="en-US" dirty="0"/>
+              <a:t>핵심 가치는 단순합니다</a:t>
+            </a:r>
+            <a:r>
+              <a:rPr lang="en-US" altLang="ko-KR" dirty="0"/>
+              <a:t>.</a:t>
+            </a:r>
+            <a:br>
+              <a:rPr lang="en-US" altLang="ko-KR" dirty="0"/>
+            </a:br>
+            <a:r>
+              <a:rPr lang="ko-KR" altLang="en-US" dirty="0"/>
+              <a:t>흩어진 </a:t>
+            </a:r>
+            <a:r>
+              <a:rPr lang="ko-KR" altLang="en-US" dirty="0" err="1"/>
+              <a:t>단톡방</a:t>
+            </a:r>
+            <a:r>
+              <a:rPr lang="ko-KR" altLang="en-US" dirty="0"/>
+              <a:t> 여행 계획을 한 곳으로 모아서</a:t>
+            </a:r>
+            <a:r>
+              <a:rPr lang="en-US" altLang="ko-KR" dirty="0"/>
+              <a:t>, </a:t>
+            </a:r>
+            <a:r>
+              <a:rPr lang="ko-KR" altLang="en-US" dirty="0"/>
+              <a:t>함께 보고 함께 결정할 수 있게 만드는 것입니다</a:t>
+            </a:r>
+            <a:r>
+              <a:rPr lang="en-US" altLang="ko-KR" dirty="0"/>
+              <a:t>.</a:t>
             </a:r>
           </a:p>
         </p:txBody>
@@ -1355,8 +2949,193 @@
           <a:lstStyle/>
           <a:p>
             <a:r>
-              <a:rPr lang="en-US" dirty="0"/>
-              <a:t>그룹 여행은 늘 번거롭습니다. 첫째 의견이 안 모이고, 둘째 일정과 장소가 단톡방·메모·지도앱에 흩어지며, 셋째 정산이 귀찮습니다. 이 세 가지를 해결하려고 합니다.</a:t>
+              <a:rPr lang="ko-KR" altLang="en-US" dirty="0"/>
+              <a:t>저희가 집중한 문제는 크게 세 가지입니다</a:t>
+            </a:r>
+            <a:r>
+              <a:rPr lang="en-US" altLang="ko-KR" dirty="0"/>
+              <a:t>.</a:t>
+            </a:r>
+          </a:p>
+          <a:p>
+            <a:r>
+              <a:rPr lang="ko-KR" altLang="en-US" dirty="0"/>
+              <a:t>첫 번째는 </a:t>
+            </a:r>
+            <a:r>
+              <a:rPr lang="ko-KR" altLang="en-US" b="1" dirty="0"/>
+              <a:t>의견이 잘 모이지 않는 것</a:t>
+            </a:r>
+            <a:r>
+              <a:rPr lang="ko-KR" altLang="en-US" dirty="0"/>
+              <a:t>입니다</a:t>
+            </a:r>
+            <a:r>
+              <a:rPr lang="en-US" altLang="ko-KR" dirty="0"/>
+              <a:t>.</a:t>
+            </a:r>
+            <a:br>
+              <a:rPr lang="en-US" altLang="ko-KR" dirty="0"/>
+            </a:br>
+            <a:r>
+              <a:rPr lang="en-US" altLang="ko-KR" dirty="0"/>
+              <a:t>“</a:t>
+            </a:r>
+            <a:r>
+              <a:rPr lang="ko-KR" altLang="en-US" dirty="0"/>
+              <a:t>어디 갈래</a:t>
+            </a:r>
+            <a:r>
+              <a:rPr lang="en-US" altLang="ko-KR" dirty="0"/>
+              <a:t>?”, “</a:t>
+            </a:r>
+            <a:r>
+              <a:rPr lang="ko-KR" altLang="en-US" dirty="0"/>
+              <a:t>뭐 </a:t>
+            </a:r>
+            <a:r>
+              <a:rPr lang="ko-KR" altLang="en-US" dirty="0" err="1"/>
+              <a:t>먹을래</a:t>
+            </a:r>
+            <a:r>
+              <a:rPr lang="en-US" altLang="ko-KR" dirty="0"/>
+              <a:t>?” </a:t>
+            </a:r>
+            <a:r>
+              <a:rPr lang="ko-KR" altLang="en-US" dirty="0"/>
+              <a:t>같은 이야기가 </a:t>
+            </a:r>
+            <a:r>
+              <a:rPr lang="ko-KR" altLang="en-US" dirty="0" err="1"/>
+              <a:t>단톡방에</a:t>
+            </a:r>
+            <a:r>
+              <a:rPr lang="ko-KR" altLang="en-US" dirty="0"/>
+              <a:t> 계속 올라오지만</a:t>
+            </a:r>
+            <a:r>
+              <a:rPr lang="en-US" altLang="ko-KR" dirty="0"/>
+              <a:t>, </a:t>
+            </a:r>
+            <a:r>
+              <a:rPr lang="ko-KR" altLang="en-US" dirty="0"/>
+              <a:t>시간이 지나면 묻히고 결정이 늦어집니다</a:t>
+            </a:r>
+            <a:r>
+              <a:rPr lang="en-US" altLang="ko-KR" dirty="0"/>
+              <a:t>.</a:t>
+            </a:r>
+          </a:p>
+          <a:p>
+            <a:r>
+              <a:rPr lang="ko-KR" altLang="en-US" dirty="0"/>
+              <a:t>두 번째는 </a:t>
+            </a:r>
+            <a:r>
+              <a:rPr lang="ko-KR" altLang="en-US" b="1" dirty="0"/>
+              <a:t>일정과 장소가 흩어지는 것</a:t>
+            </a:r>
+            <a:r>
+              <a:rPr lang="ko-KR" altLang="en-US" dirty="0"/>
+              <a:t>입니다</a:t>
+            </a:r>
+            <a:r>
+              <a:rPr lang="en-US" altLang="ko-KR" dirty="0"/>
+              <a:t>.</a:t>
+            </a:r>
+            <a:br>
+              <a:rPr lang="en-US" altLang="ko-KR" dirty="0"/>
+            </a:br>
+            <a:r>
+              <a:rPr lang="ko-KR" altLang="en-US" dirty="0"/>
+              <a:t>누군가는 네이버 지도에 저장하고</a:t>
+            </a:r>
+            <a:r>
+              <a:rPr lang="en-US" altLang="ko-KR" dirty="0"/>
+              <a:t>, </a:t>
+            </a:r>
+            <a:r>
+              <a:rPr lang="ko-KR" altLang="en-US" dirty="0"/>
+              <a:t>누군가는 캡처를 보내고</a:t>
+            </a:r>
+            <a:r>
+              <a:rPr lang="en-US" altLang="ko-KR" dirty="0"/>
+              <a:t>, </a:t>
+            </a:r>
+            <a:r>
+              <a:rPr lang="ko-KR" altLang="en-US" dirty="0"/>
+              <a:t>누군가는 </a:t>
+            </a:r>
+            <a:r>
+              <a:rPr lang="ko-KR" altLang="en-US" dirty="0" err="1"/>
+              <a:t>메모앱에</a:t>
+            </a:r>
+            <a:r>
+              <a:rPr lang="ko-KR" altLang="en-US" dirty="0"/>
+              <a:t> </a:t>
+            </a:r>
+            <a:r>
+              <a:rPr lang="ko-KR" altLang="en-US" dirty="0" err="1"/>
+              <a:t>적어두기</a:t>
+            </a:r>
+            <a:r>
+              <a:rPr lang="ko-KR" altLang="en-US" dirty="0"/>
+              <a:t> 때문에 전체 일정을 한눈에 보기 어렵습니다</a:t>
+            </a:r>
+            <a:r>
+              <a:rPr lang="en-US" altLang="ko-KR" dirty="0"/>
+              <a:t>.</a:t>
+            </a:r>
+          </a:p>
+          <a:p>
+            <a:r>
+              <a:rPr lang="ko-KR" altLang="en-US" dirty="0"/>
+              <a:t>세 번째는 </a:t>
+            </a:r>
+            <a:r>
+              <a:rPr lang="ko-KR" altLang="en-US" b="1" dirty="0"/>
+              <a:t>정산이 번거로운 것</a:t>
+            </a:r>
+            <a:r>
+              <a:rPr lang="ko-KR" altLang="en-US" dirty="0"/>
+              <a:t>입니다</a:t>
+            </a:r>
+            <a:r>
+              <a:rPr lang="en-US" altLang="ko-KR" dirty="0"/>
+              <a:t>.</a:t>
+            </a:r>
+            <a:br>
+              <a:rPr lang="en-US" altLang="ko-KR" dirty="0"/>
+            </a:br>
+            <a:r>
+              <a:rPr lang="ko-KR" altLang="en-US" dirty="0"/>
+              <a:t>여행이 끝나고 나면 누가 얼마를 냈는지</a:t>
+            </a:r>
+            <a:r>
+              <a:rPr lang="en-US" altLang="ko-KR" dirty="0"/>
+              <a:t>, </a:t>
+            </a:r>
+            <a:r>
+              <a:rPr lang="ko-KR" altLang="en-US" dirty="0"/>
+              <a:t>누구에게 얼마를 보내야 하는지 계산기를 두드리거나 엑셀로 정리해야 합니다</a:t>
+            </a:r>
+            <a:r>
+              <a:rPr lang="en-US" altLang="ko-KR" dirty="0"/>
+              <a:t>.</a:t>
+            </a:r>
+          </a:p>
+          <a:p>
+            <a:r>
+              <a:rPr lang="en-US" altLang="ko-KR" dirty="0" err="1"/>
+              <a:t>Groutrip</a:t>
+            </a:r>
+            <a:r>
+              <a:rPr lang="ko-KR" altLang="en-US" dirty="0"/>
+              <a:t>은 이 세 가지 불편함을 해결하기 위해 시작한 프로젝트입니다</a:t>
+            </a:r>
+            <a:r>
+              <a:rPr lang="en-US" altLang="ko-KR" dirty="0"/>
+              <a:t>.</a:t>
             </a:r>
           </a:p>
         </p:txBody>
@@ -1442,8 +3221,156 @@
           <a:lstStyle/>
           <a:p>
             <a:r>
-              <a:rPr lang="en-US" dirty="0"/>
-              <a:t>타깃은 단톡방으로 여행을 짜는 친구·가족·동아리 모임입니다. 지금은 의견은 단톡방, 일정은 메모앱, 장소는 지도앱, 정산은 엑셀처럼 도구가 흩어져 있습니다. 이걸 Groutrip 한 곳으로 모읍니다.</a:t>
+              <a:rPr lang="en-US" altLang="ko-KR" dirty="0" err="1"/>
+              <a:t>Groutrip</a:t>
+            </a:r>
+            <a:r>
+              <a:rPr lang="ko-KR" altLang="en-US" dirty="0"/>
+              <a:t>의 주요 사용자는 </a:t>
+            </a:r>
+            <a:r>
+              <a:rPr lang="ko-KR" altLang="en-US" dirty="0" err="1"/>
+              <a:t>단톡방으로</a:t>
+            </a:r>
+            <a:r>
+              <a:rPr lang="ko-KR" altLang="en-US" dirty="0"/>
+              <a:t> 여행을 계획하는 사람들입니다</a:t>
+            </a:r>
+            <a:r>
+              <a:rPr lang="en-US" altLang="ko-KR" dirty="0"/>
+              <a:t>.</a:t>
+            </a:r>
+          </a:p>
+          <a:p>
+            <a:r>
+              <a:rPr lang="ko-KR" altLang="en-US" dirty="0"/>
+              <a:t>예를 들어 친구 여행</a:t>
+            </a:r>
+            <a:r>
+              <a:rPr lang="en-US" altLang="ko-KR" dirty="0"/>
+              <a:t>, </a:t>
+            </a:r>
+            <a:r>
+              <a:rPr lang="ko-KR" altLang="en-US" dirty="0"/>
+              <a:t>가족 여행</a:t>
+            </a:r>
+            <a:r>
+              <a:rPr lang="en-US" altLang="ko-KR" dirty="0"/>
+              <a:t>, </a:t>
+            </a:r>
+            <a:r>
+              <a:rPr lang="ko-KR" altLang="en-US" dirty="0"/>
+              <a:t>동아리 </a:t>
+            </a:r>
+            <a:r>
+              <a:rPr lang="en-US" altLang="ko-KR" dirty="0"/>
+              <a:t>MT, </a:t>
+            </a:r>
+            <a:r>
+              <a:rPr lang="ko-KR" altLang="en-US" dirty="0"/>
+              <a:t>회사 워크숍처럼 여러 명이 함께 이동하고 함께 비용을 쓰는 상황입니다</a:t>
+            </a:r>
+            <a:r>
+              <a:rPr lang="en-US" altLang="ko-KR" dirty="0"/>
+              <a:t>.</a:t>
+            </a:r>
+          </a:p>
+          <a:p>
+            <a:r>
+              <a:rPr lang="ko-KR" altLang="en-US" dirty="0"/>
+              <a:t>현재는 의견은 </a:t>
+            </a:r>
+            <a:r>
+              <a:rPr lang="ko-KR" altLang="en-US" dirty="0" err="1"/>
+              <a:t>단톡방에</a:t>
+            </a:r>
+            <a:r>
+              <a:rPr lang="ko-KR" altLang="en-US" dirty="0"/>
+              <a:t> 있고</a:t>
+            </a:r>
+            <a:r>
+              <a:rPr lang="en-US" altLang="ko-KR" dirty="0"/>
+              <a:t>, </a:t>
+            </a:r>
+            <a:r>
+              <a:rPr lang="ko-KR" altLang="en-US" dirty="0"/>
+              <a:t>일정은 </a:t>
+            </a:r>
+            <a:r>
+              <a:rPr lang="ko-KR" altLang="en-US" dirty="0" err="1"/>
+              <a:t>메모앱에</a:t>
+            </a:r>
+            <a:r>
+              <a:rPr lang="ko-KR" altLang="en-US" dirty="0"/>
+              <a:t> 있고</a:t>
+            </a:r>
+            <a:r>
+              <a:rPr lang="en-US" altLang="ko-KR" dirty="0"/>
+              <a:t>, </a:t>
+            </a:r>
+            <a:r>
+              <a:rPr lang="ko-KR" altLang="en-US" dirty="0"/>
+              <a:t>장소는 </a:t>
+            </a:r>
+            <a:r>
+              <a:rPr lang="ko-KR" altLang="en-US" dirty="0" err="1"/>
+              <a:t>지도앱에</a:t>
+            </a:r>
+            <a:r>
+              <a:rPr lang="ko-KR" altLang="en-US" dirty="0"/>
+              <a:t> 있고</a:t>
+            </a:r>
+            <a:r>
+              <a:rPr lang="en-US" altLang="ko-KR" dirty="0"/>
+              <a:t>, </a:t>
+            </a:r>
+            <a:r>
+              <a:rPr lang="ko-KR" altLang="en-US" dirty="0"/>
+              <a:t>정산은 엑셀이나 계산기에 따로 있습니다</a:t>
+            </a:r>
+            <a:r>
+              <a:rPr lang="en-US" altLang="ko-KR" dirty="0"/>
+              <a:t>.</a:t>
+            </a:r>
+          </a:p>
+          <a:p>
+            <a:r>
+              <a:rPr lang="ko-KR" altLang="en-US" dirty="0"/>
+              <a:t>이처럼 여행 준비에 필요한 정보가 여러 도구에 흩어져 있기 때문에</a:t>
+            </a:r>
+            <a:r>
+              <a:rPr lang="en-US" altLang="ko-KR" dirty="0"/>
+              <a:t>, </a:t>
+            </a:r>
+            <a:r>
+              <a:rPr lang="ko-KR" altLang="en-US" dirty="0"/>
+              <a:t>중간에 정보가 빠지거나 누가 결정했는지 헷갈리는 문제가 생깁니다</a:t>
+            </a:r>
+            <a:r>
+              <a:rPr lang="en-US" altLang="ko-KR" dirty="0"/>
+              <a:t>.</a:t>
+            </a:r>
+          </a:p>
+          <a:p>
+            <a:r>
+              <a:rPr lang="ko-KR" altLang="en-US" dirty="0"/>
+              <a:t>그래서 저희는 이 흩어진 정보들을 </a:t>
+            </a:r>
+            <a:r>
+              <a:rPr lang="en-US" altLang="ko-KR" dirty="0" err="1"/>
+              <a:t>Groutrip</a:t>
+            </a:r>
+            <a:r>
+              <a:rPr lang="en-US" altLang="ko-KR" dirty="0"/>
+              <a:t> </a:t>
+            </a:r>
+            <a:r>
+              <a:rPr lang="ko-KR" altLang="en-US" dirty="0"/>
+              <a:t>한 곳으로 모으는 것을 목표로 했습니다</a:t>
+            </a:r>
+            <a:r>
+              <a:rPr lang="en-US" altLang="ko-KR" dirty="0"/>
+              <a:t>.</a:t>
             </a:r>
           </a:p>
         </p:txBody>
@@ -1529,8 +3456,217 @@
           <a:lstStyle/>
           <a:p>
             <a:r>
-              <a:rPr lang="en-US" dirty="0"/>
-              <a:t>다섯 가지 차별점을 세 묶음으로 나눴습니다. 함께 결정하는 그룹 의사결정과 실시간 반영, 취향을 아는 성향 매칭, 그리고 한국에 맞춘 국내 최적화와 한국형 정산입니다.</a:t>
+              <a:rPr lang="en-US" altLang="ko-KR" dirty="0" err="1"/>
+              <a:t>Groutrip</a:t>
+            </a:r>
+            <a:r>
+              <a:rPr lang="ko-KR" altLang="en-US" dirty="0"/>
+              <a:t>의 차별점은 크게 세 묶음으로 볼 수 있습니다</a:t>
+            </a:r>
+            <a:r>
+              <a:rPr lang="en-US" altLang="ko-KR" dirty="0"/>
+              <a:t>.</a:t>
+            </a:r>
+          </a:p>
+          <a:p>
+            <a:r>
+              <a:rPr lang="ko-KR" altLang="en-US" dirty="0"/>
+              <a:t>첫 번째는 </a:t>
+            </a:r>
+            <a:r>
+              <a:rPr lang="ko-KR" altLang="en-US" b="1" dirty="0"/>
+              <a:t>다 함께 </a:t>
+            </a:r>
+            <a:r>
+              <a:rPr lang="ko-KR" altLang="en-US" b="1" dirty="0" err="1"/>
+              <a:t>의사결정할</a:t>
+            </a:r>
+            <a:r>
+              <a:rPr lang="ko-KR" altLang="en-US" b="1" dirty="0"/>
+              <a:t> 수 있다는 점</a:t>
+            </a:r>
+            <a:r>
+              <a:rPr lang="ko-KR" altLang="en-US" dirty="0"/>
+              <a:t>입니다</a:t>
+            </a:r>
+            <a:r>
+              <a:rPr lang="en-US" altLang="ko-KR" dirty="0"/>
+              <a:t>.</a:t>
+            </a:r>
+            <a:br>
+              <a:rPr lang="en-US" altLang="ko-KR" dirty="0"/>
+            </a:br>
+            <a:r>
+              <a:rPr lang="ko-KR" altLang="en-US" dirty="0"/>
+              <a:t>여행 장소나 식당 후보를 올리고</a:t>
+            </a:r>
+            <a:r>
+              <a:rPr lang="en-US" altLang="ko-KR" dirty="0"/>
+              <a:t>, </a:t>
+            </a:r>
+            <a:r>
+              <a:rPr lang="ko-KR" altLang="en-US" dirty="0"/>
+              <a:t>구성원들이 점수로 투표해서 함께 결정할 수 있습니다</a:t>
+            </a:r>
+            <a:r>
+              <a:rPr lang="en-US" altLang="ko-KR" dirty="0"/>
+              <a:t>.</a:t>
+            </a:r>
+            <a:br>
+              <a:rPr lang="en-US" altLang="ko-KR" dirty="0"/>
+            </a:br>
+            <a:r>
+              <a:rPr lang="ko-KR" altLang="en-US" dirty="0"/>
+              <a:t>또 </a:t>
+            </a:r>
+            <a:r>
+              <a:rPr lang="en-US" altLang="ko-KR" dirty="0"/>
+              <a:t>SSE</a:t>
+            </a:r>
+            <a:r>
+              <a:rPr lang="ko-KR" altLang="en-US" dirty="0"/>
+              <a:t>를 활용해 변경 사항이 실시간으로 반영되도록 했습니다</a:t>
+            </a:r>
+            <a:r>
+              <a:rPr lang="en-US" altLang="ko-KR" dirty="0"/>
+              <a:t>.</a:t>
+            </a:r>
+          </a:p>
+          <a:p>
+            <a:r>
+              <a:rPr lang="ko-KR" altLang="en-US" dirty="0"/>
+              <a:t>두 번째는 </a:t>
+            </a:r>
+            <a:r>
+              <a:rPr lang="ko-KR" altLang="en-US" b="1" dirty="0"/>
+              <a:t>취향을 고려한다는 점</a:t>
+            </a:r>
+            <a:r>
+              <a:rPr lang="ko-KR" altLang="en-US" dirty="0"/>
+              <a:t>입니다</a:t>
+            </a:r>
+            <a:r>
+              <a:rPr lang="en-US" altLang="ko-KR" dirty="0"/>
+              <a:t>.</a:t>
+            </a:r>
+            <a:br>
+              <a:rPr lang="en-US" altLang="ko-KR" dirty="0"/>
+            </a:br>
+            <a:r>
+              <a:rPr lang="ko-KR" altLang="en-US" dirty="0"/>
+              <a:t>사용자가 성향 설문을 하면 그룹의 평균 여행 성향을 확인할 수 있습니다</a:t>
+            </a:r>
+            <a:r>
+              <a:rPr lang="en-US" altLang="ko-KR" dirty="0"/>
+              <a:t>.</a:t>
+            </a:r>
+            <a:br>
+              <a:rPr lang="en-US" altLang="ko-KR" dirty="0"/>
+            </a:br>
+            <a:r>
+              <a:rPr lang="ko-KR" altLang="en-US" dirty="0"/>
+              <a:t>예를 들어 </a:t>
+            </a:r>
+            <a:r>
+              <a:rPr lang="ko-KR" altLang="en-US" dirty="0" err="1"/>
+              <a:t>계획형인지</a:t>
+            </a:r>
+            <a:r>
+              <a:rPr lang="ko-KR" altLang="en-US" dirty="0"/>
+              <a:t> </a:t>
+            </a:r>
+            <a:r>
+              <a:rPr lang="ko-KR" altLang="en-US" dirty="0" err="1"/>
+              <a:t>즉흥형인지</a:t>
+            </a:r>
+            <a:r>
+              <a:rPr lang="en-US" altLang="ko-KR" dirty="0"/>
+              <a:t>, </a:t>
+            </a:r>
+            <a:r>
+              <a:rPr lang="ko-KR" altLang="en-US" dirty="0"/>
+              <a:t>맛집 중심인지 휴식 중심인지 파악할 수 있습니다</a:t>
+            </a:r>
+            <a:r>
+              <a:rPr lang="en-US" altLang="ko-KR" dirty="0"/>
+              <a:t>.</a:t>
+            </a:r>
+          </a:p>
+          <a:p>
+            <a:r>
+              <a:rPr lang="ko-KR" altLang="en-US" dirty="0"/>
+              <a:t>세 번째는 </a:t>
+            </a:r>
+            <a:r>
+              <a:rPr lang="ko-KR" altLang="en-US" b="1" dirty="0"/>
+              <a:t>국내 여행에 맞춘 기능</a:t>
+            </a:r>
+            <a:r>
+              <a:rPr lang="ko-KR" altLang="en-US" dirty="0"/>
+              <a:t>입니다</a:t>
+            </a:r>
+            <a:r>
+              <a:rPr lang="en-US" altLang="ko-KR" dirty="0"/>
+              <a:t>.</a:t>
+            </a:r>
+            <a:br>
+              <a:rPr lang="en-US" altLang="ko-KR" dirty="0"/>
+            </a:br>
+            <a:r>
+              <a:rPr lang="en-US" altLang="ko-KR" dirty="0" err="1"/>
+              <a:t>TourAPI</a:t>
+            </a:r>
+            <a:r>
+              <a:rPr lang="en-US" altLang="ko-KR" dirty="0"/>
+              <a:t>, </a:t>
+            </a:r>
+            <a:r>
+              <a:rPr lang="en-US" altLang="ko-KR" dirty="0" err="1"/>
+              <a:t>Kakao</a:t>
+            </a:r>
+            <a:r>
+              <a:rPr lang="en-US" altLang="ko-KR" dirty="0"/>
+              <a:t>, Google Places, Gemini </a:t>
+            </a:r>
+            <a:r>
+              <a:rPr lang="ko-KR" altLang="en-US" dirty="0"/>
+              <a:t>등을 활용해 국내 장소 추천</a:t>
+            </a:r>
+            <a:r>
+              <a:rPr lang="en-US" altLang="ko-KR" dirty="0"/>
+              <a:t>, </a:t>
+            </a:r>
+            <a:r>
+              <a:rPr lang="ko-KR" altLang="en-US" dirty="0"/>
+              <a:t>이동 시간 계산</a:t>
+            </a:r>
+            <a:r>
+              <a:rPr lang="en-US" altLang="ko-KR" dirty="0"/>
+              <a:t>, </a:t>
+            </a:r>
+            <a:r>
+              <a:rPr lang="ko-KR" altLang="en-US" dirty="0"/>
+              <a:t>지도 표시</a:t>
+            </a:r>
+            <a:r>
+              <a:rPr lang="en-US" altLang="ko-KR" dirty="0"/>
+              <a:t>, </a:t>
+            </a:r>
+            <a:r>
+              <a:rPr lang="ko-KR" altLang="en-US" dirty="0"/>
+              <a:t>리뷰 요약</a:t>
+            </a:r>
+            <a:r>
+              <a:rPr lang="en-US" altLang="ko-KR" dirty="0"/>
+              <a:t>, </a:t>
+            </a:r>
+            <a:r>
+              <a:rPr lang="ko-KR" altLang="en-US" dirty="0"/>
+              <a:t>한국형 정산 흐름을 지원하도록 구성했습니다</a:t>
+            </a:r>
+            <a:r>
+              <a:rPr lang="en-US" altLang="ko-KR" dirty="0"/>
+              <a:t>.</a:t>
             </a:r>
           </a:p>
         </p:txBody>
@@ -1616,8 +3752,118 @@
           <a:lstStyle/>
           <a:p>
             <a:r>
-              <a:rPr lang="en-US" dirty="0"/>
-              <a:t>사용자 여정은 한 줄로 흐릅니다. 그룹을 만들고, 숙소로 여행을 계획하고, 장소를 모으고, 일정을 짜고, 투표로 정하고, 정산하고, 마지막에 회고합니다. 여행 한 번의 전체 흐름입니다.</a:t>
+              <a:rPr lang="en-US" altLang="ko-KR" dirty="0" err="1"/>
+              <a:t>Groutrip</a:t>
+            </a:r>
+            <a:r>
+              <a:rPr lang="ko-KR" altLang="en-US" dirty="0"/>
+              <a:t>의 사용자 여정은 여행 준비의 흐름을 따라갑니다</a:t>
+            </a:r>
+            <a:r>
+              <a:rPr lang="en-US" altLang="ko-KR" dirty="0"/>
+              <a:t>.</a:t>
+            </a:r>
+          </a:p>
+          <a:p>
+            <a:r>
+              <a:rPr lang="ko-KR" altLang="en-US" dirty="0"/>
+              <a:t>먼저 사용자는 여행 그룹을 생성하고</a:t>
+            </a:r>
+            <a:r>
+              <a:rPr lang="en-US" altLang="ko-KR" dirty="0"/>
+              <a:t>, </a:t>
+            </a:r>
+            <a:r>
+              <a:rPr lang="ko-KR" altLang="en-US" dirty="0"/>
+              <a:t>초대코드로 멤버를 초대합니다</a:t>
+            </a:r>
+            <a:r>
+              <a:rPr lang="en-US" altLang="ko-KR" dirty="0"/>
+              <a:t>.</a:t>
+            </a:r>
+          </a:p>
+          <a:p>
+            <a:r>
+              <a:rPr lang="ko-KR" altLang="en-US" dirty="0" err="1"/>
+              <a:t>그다음</a:t>
+            </a:r>
+            <a:r>
+              <a:rPr lang="ko-KR" altLang="en-US" dirty="0"/>
+              <a:t> 여행 기간과 숙소 같은 기본 계획을 정하고</a:t>
+            </a:r>
+            <a:r>
+              <a:rPr lang="en-US" altLang="ko-KR" dirty="0"/>
+              <a:t>, </a:t>
+            </a:r>
+            <a:r>
+              <a:rPr lang="ko-KR" altLang="en-US" dirty="0"/>
+              <a:t>가고 싶은 장소를 모읍니다</a:t>
+            </a:r>
+            <a:r>
+              <a:rPr lang="en-US" altLang="ko-KR" dirty="0"/>
+              <a:t>.</a:t>
+            </a:r>
+          </a:p>
+          <a:p>
+            <a:r>
+              <a:rPr lang="ko-KR" altLang="en-US" dirty="0"/>
+              <a:t>모은 장소를 바탕으로 </a:t>
+            </a:r>
+            <a:r>
+              <a:rPr lang="ko-KR" altLang="en-US" dirty="0" err="1"/>
+              <a:t>일자별</a:t>
+            </a:r>
+            <a:r>
+              <a:rPr lang="ko-KR" altLang="en-US" dirty="0"/>
+              <a:t> 일정을 구성하고</a:t>
+            </a:r>
+            <a:r>
+              <a:rPr lang="en-US" altLang="ko-KR" dirty="0"/>
+              <a:t>, </a:t>
+            </a:r>
+            <a:r>
+              <a:rPr lang="ko-KR" altLang="en-US" dirty="0"/>
+              <a:t>의견이 갈리는 부분은 투표로 결정합니다</a:t>
+            </a:r>
+            <a:r>
+              <a:rPr lang="en-US" altLang="ko-KR" dirty="0"/>
+              <a:t>.</a:t>
+            </a:r>
+          </a:p>
+          <a:p>
+            <a:r>
+              <a:rPr lang="ko-KR" altLang="en-US" dirty="0"/>
+              <a:t>여행 중 또는 여행 후에는 지출 내역을 등록하고</a:t>
+            </a:r>
+            <a:r>
+              <a:rPr lang="en-US" altLang="ko-KR" dirty="0"/>
+              <a:t>, </a:t>
+            </a:r>
+            <a:r>
+              <a:rPr lang="ko-KR" altLang="en-US" dirty="0"/>
+              <a:t>마지막으로 정산까지 진행합니다</a:t>
+            </a:r>
+            <a:r>
+              <a:rPr lang="en-US" altLang="ko-KR" dirty="0"/>
+              <a:t>.</a:t>
+            </a:r>
+          </a:p>
+          <a:p>
+            <a:r>
+              <a:rPr lang="ko-KR" altLang="en-US" dirty="0"/>
+              <a:t>즉 </a:t>
+            </a:r>
+            <a:r>
+              <a:rPr lang="en-US" altLang="ko-KR" dirty="0" err="1"/>
+              <a:t>Groutrip</a:t>
+            </a:r>
+            <a:r>
+              <a:rPr lang="ko-KR" altLang="en-US" dirty="0"/>
+              <a:t>은 여행을 계획하는 순간부터 정산하는 순간까지 이어지는 전체 흐름을 하나의 서비스 안에서 처리하도록 설계했습니다</a:t>
+            </a:r>
+            <a:r>
+              <a:rPr lang="en-US" altLang="ko-KR" dirty="0"/>
+              <a:t>.</a:t>
             </a:r>
           </a:p>
         </p:txBody>
@@ -1703,8 +3949,113 @@
           <a:lstStyle/>
           <a:p>
             <a:r>
-              <a:rPr lang="en-US" dirty="0"/>
-              <a:t>첫 번째 기능, 그룹과 성향 페르소나입니다. 초대코드로 그룹에 모이고, 다섯 가지 차원의 성향 설문에 답하면 그룹의 평균 성향이 페르소나로 만들어집니다. 어떤 여행을 좋아하는 모임인지 한눈에 보입니다.</a:t>
+              <a:rPr lang="ko-KR" altLang="en-US" dirty="0"/>
+              <a:t>첫 번째 핵심 기능은 </a:t>
+            </a:r>
+            <a:r>
+              <a:rPr lang="ko-KR" altLang="en-US" b="1" dirty="0"/>
+              <a:t>그룹과 성향 페르소나</a:t>
+            </a:r>
+            <a:r>
+              <a:rPr lang="ko-KR" altLang="en-US" dirty="0"/>
+              <a:t>입니다</a:t>
+            </a:r>
+            <a:r>
+              <a:rPr lang="en-US" altLang="ko-KR" dirty="0"/>
+              <a:t>.</a:t>
+            </a:r>
+          </a:p>
+          <a:p>
+            <a:r>
+              <a:rPr lang="ko-KR" altLang="en-US" dirty="0"/>
+              <a:t>사용자는 여행 그룹을 만들고</a:t>
+            </a:r>
+            <a:r>
+              <a:rPr lang="en-US" altLang="ko-KR" dirty="0"/>
+              <a:t>, </a:t>
+            </a:r>
+            <a:r>
+              <a:rPr lang="ko-KR" altLang="en-US" dirty="0"/>
+              <a:t>초대코드를 통해 다른 사람들을 초대할 수 있습니다</a:t>
+            </a:r>
+            <a:r>
+              <a:rPr lang="en-US" altLang="ko-KR" dirty="0"/>
+              <a:t>.</a:t>
+            </a:r>
+          </a:p>
+          <a:p>
+            <a:r>
+              <a:rPr lang="ko-KR" altLang="en-US" dirty="0"/>
+              <a:t>또한 구성원들은 </a:t>
+            </a:r>
+            <a:r>
+              <a:rPr lang="en-US" altLang="ko-KR" dirty="0"/>
+              <a:t>5</a:t>
+            </a:r>
+            <a:r>
+              <a:rPr lang="ko-KR" altLang="en-US" dirty="0"/>
+              <a:t>차원 성향 설문에 답하게 됩니다</a:t>
+            </a:r>
+            <a:r>
+              <a:rPr lang="en-US" altLang="ko-KR" dirty="0"/>
+              <a:t>.</a:t>
+            </a:r>
+            <a:br>
+              <a:rPr lang="en-US" altLang="ko-KR" dirty="0"/>
+            </a:br>
+            <a:r>
+              <a:rPr lang="ko-KR" altLang="en-US" dirty="0"/>
+              <a:t>예를 들어 </a:t>
+            </a:r>
+            <a:r>
+              <a:rPr lang="ko-KR" altLang="en-US" dirty="0" err="1"/>
+              <a:t>계획형인지</a:t>
+            </a:r>
+            <a:r>
+              <a:rPr lang="ko-KR" altLang="en-US" dirty="0"/>
+              <a:t> </a:t>
+            </a:r>
+            <a:r>
+              <a:rPr lang="ko-KR" altLang="en-US" dirty="0" err="1"/>
+              <a:t>즉흥형인지</a:t>
+            </a:r>
+            <a:r>
+              <a:rPr lang="en-US" altLang="ko-KR" dirty="0"/>
+              <a:t>, </a:t>
+            </a:r>
+            <a:r>
+              <a:rPr lang="ko-KR" altLang="en-US" dirty="0"/>
+              <a:t>액티비티를 선호하는지 휴식을 선호하는지</a:t>
+            </a:r>
+            <a:r>
+              <a:rPr lang="en-US" altLang="ko-KR" dirty="0"/>
+              <a:t>, </a:t>
+            </a:r>
+            <a:r>
+              <a:rPr lang="ko-KR" altLang="en-US" dirty="0"/>
+              <a:t>맛집 중심인지 가성비 중심인지 등을 선택합니다</a:t>
+            </a:r>
+            <a:r>
+              <a:rPr lang="en-US" altLang="ko-KR" dirty="0"/>
+              <a:t>.</a:t>
+            </a:r>
+          </a:p>
+          <a:p>
+            <a:r>
+              <a:rPr lang="ko-KR" altLang="en-US" dirty="0"/>
+              <a:t>이 응답을 바탕으로 그룹의 평균 성향을 계산하고</a:t>
+            </a:r>
+            <a:r>
+              <a:rPr lang="en-US" altLang="ko-KR" dirty="0"/>
+              <a:t>, </a:t>
+            </a:r>
+            <a:r>
+              <a:rPr lang="ko-KR" altLang="en-US" dirty="0"/>
+              <a:t>이를 바탕으로 장소들을 추천해줍니다</a:t>
+            </a:r>
+            <a:r>
+              <a:rPr lang="en-US" altLang="ko-KR" dirty="0"/>
+              <a:t>.</a:t>
             </a:r>
           </a:p>
         </p:txBody>
@@ -1790,8 +4141,146 @@
           <a:lstStyle/>
           <a:p>
             <a:r>
-              <a:rPr lang="en-US" dirty="0"/>
-              <a:t>두 번째 기능은 장소 검색과 보관함, 그리고 AI 리뷰 요약입니다. Google Places 한 소스로 검색하고, 카테고리 색 태그로 구분해 보관합니다. 리뷰가 많아 읽기 힘들 땐 Gemini가 핵심만 요약해 줍니다.</a:t>
+              <a:rPr lang="ko-KR" altLang="en-US" dirty="0"/>
+              <a:t>두 번째 기능은 </a:t>
+            </a:r>
+            <a:r>
+              <a:rPr lang="ko-KR" altLang="en-US" b="1" dirty="0"/>
+              <a:t>장소 검색과 </a:t>
+            </a:r>
+            <a:r>
+              <a:rPr lang="en-US" altLang="ko-KR" b="1" dirty="0"/>
+              <a:t>AI </a:t>
+            </a:r>
+            <a:r>
+              <a:rPr lang="ko-KR" altLang="en-US" b="1" dirty="0"/>
+              <a:t>리뷰 요약</a:t>
+            </a:r>
+            <a:r>
+              <a:rPr lang="ko-KR" altLang="en-US" dirty="0"/>
+              <a:t>입니다</a:t>
+            </a:r>
+            <a:r>
+              <a:rPr lang="en-US" altLang="ko-KR" dirty="0"/>
+              <a:t>.</a:t>
+            </a:r>
+          </a:p>
+          <a:p>
+            <a:r>
+              <a:rPr lang="ko-KR" altLang="en-US" dirty="0"/>
+              <a:t>사용자는 </a:t>
+            </a:r>
+            <a:r>
+              <a:rPr lang="en-US" altLang="ko-KR" dirty="0"/>
+              <a:t>Google Places </a:t>
+            </a:r>
+            <a:r>
+              <a:rPr lang="ko-KR" altLang="en-US" dirty="0"/>
+              <a:t>기반으로 여행 장소를 검색할 수 있습니다</a:t>
+            </a:r>
+            <a:r>
+              <a:rPr lang="en-US" altLang="ko-KR" dirty="0"/>
+              <a:t>.</a:t>
+            </a:r>
+            <a:br>
+              <a:rPr lang="en-US" altLang="ko-KR" dirty="0"/>
+            </a:br>
+            <a:r>
+              <a:rPr lang="ko-KR" altLang="en-US" dirty="0"/>
+              <a:t>검색한 장소는 맛집</a:t>
+            </a:r>
+            <a:r>
+              <a:rPr lang="en-US" altLang="ko-KR" dirty="0"/>
+              <a:t>, </a:t>
+            </a:r>
+            <a:r>
+              <a:rPr lang="ko-KR" altLang="en-US" dirty="0"/>
+              <a:t>카페</a:t>
+            </a:r>
+            <a:r>
+              <a:rPr lang="en-US" altLang="ko-KR" dirty="0"/>
+              <a:t>, </a:t>
+            </a:r>
+            <a:r>
+              <a:rPr lang="ko-KR" altLang="en-US" dirty="0"/>
+              <a:t>관광지처럼 카테고리별로 구분해서 보관할 수 있습니다</a:t>
+            </a:r>
+            <a:r>
+              <a:rPr lang="en-US" altLang="ko-KR" dirty="0"/>
+              <a:t>.</a:t>
+            </a:r>
+          </a:p>
+          <a:p>
+            <a:r>
+              <a:rPr lang="ko-KR" altLang="en-US" dirty="0"/>
+              <a:t>여행 장소를 고를 때 리뷰가 많으면 오히려 하나하나 읽기가 어렵습니다</a:t>
+            </a:r>
+            <a:r>
+              <a:rPr lang="en-US" altLang="ko-KR" dirty="0"/>
+              <a:t>.</a:t>
+            </a:r>
+            <a:br>
+              <a:rPr lang="en-US" altLang="ko-KR" dirty="0"/>
+            </a:br>
+            <a:r>
+              <a:rPr lang="ko-KR" altLang="en-US" dirty="0"/>
+              <a:t>그래서 저희는 </a:t>
+            </a:r>
+            <a:r>
+              <a:rPr lang="en-US" altLang="ko-KR" dirty="0"/>
+              <a:t>Gemini</a:t>
+            </a:r>
+            <a:r>
+              <a:rPr lang="ko-KR" altLang="en-US" dirty="0"/>
+              <a:t>를 활용해 많은 리뷰를 핵심 내용 중심으로 </a:t>
+            </a:r>
+            <a:r>
+              <a:rPr lang="en-US" altLang="ko-KR" dirty="0"/>
+              <a:t>3</a:t>
+            </a:r>
+            <a:r>
+              <a:rPr lang="ko-KR" altLang="en-US" dirty="0"/>
+              <a:t>줄 요약하도록 구성했습니다</a:t>
+            </a:r>
+            <a:r>
+              <a:rPr lang="en-US" altLang="ko-KR" dirty="0"/>
+              <a:t>.</a:t>
+            </a:r>
+          </a:p>
+          <a:p>
+            <a:r>
+              <a:rPr lang="ko-KR" altLang="en-US" dirty="0"/>
+              <a:t>예를 들어 대표 메뉴</a:t>
+            </a:r>
+            <a:r>
+              <a:rPr lang="en-US" altLang="ko-KR" dirty="0"/>
+              <a:t>, </a:t>
+            </a:r>
+            <a:r>
+              <a:rPr lang="ko-KR" altLang="en-US" dirty="0"/>
+              <a:t>방문하기 좋은 시간</a:t>
+            </a:r>
+            <a:r>
+              <a:rPr lang="en-US" altLang="ko-KR" dirty="0"/>
+              <a:t>, </a:t>
+            </a:r>
+            <a:r>
+              <a:rPr lang="ko-KR" altLang="en-US" dirty="0"/>
+              <a:t>주차나 대기 같은 주의사항을 짧게 보여줍니다</a:t>
+            </a:r>
+            <a:r>
+              <a:rPr lang="en-US" altLang="ko-KR" dirty="0"/>
+              <a:t>.</a:t>
+            </a:r>
+          </a:p>
+          <a:p>
+            <a:r>
+              <a:rPr lang="ko-KR" altLang="en-US" dirty="0"/>
+              <a:t>이를 통해 사용자는 리뷰 전체를 읽지 않아도 장소의 장단점을 빠르게 판단할 수 있습니다</a:t>
+            </a:r>
+            <a:r>
+              <a:rPr lang="en-US" altLang="ko-KR" dirty="0"/>
+              <a:t>.</a:t>
             </a:r>
           </a:p>
         </p:txBody>
@@ -2751,10 +5240,10 @@
           <p:nvPr/>
         </p:nvPicPr>
         <p:blipFill>
-          <a:blip>
+          <a:blip r:embed="rId4">
             <a:extLst>
               <a:ext uri="{96DAC541-7B7A-43D3-8B79-37D633B846F1}">
-                <asvg:svgBlip xmlns:asvg="http://schemas.microsoft.com/office/drawing/2016/SVG/main" r:embed="rId4"/>
+                <asvg:svgBlip xmlns:asvg="http://schemas.microsoft.com/office/drawing/2016/SVG/main" r:embed="rId5"/>
               </a:ext>
             </a:extLst>
           </a:blip>
@@ -4126,10 +6615,10 @@
           <p:nvPr/>
         </p:nvPicPr>
         <p:blipFill>
-          <a:blip>
+          <a:blip r:embed="rId4">
             <a:extLst>
               <a:ext uri="{96DAC541-7B7A-43D3-8B79-37D633B846F1}">
-                <asvg:svgBlip xmlns:asvg="http://schemas.microsoft.com/office/drawing/2016/SVG/main" r:embed="rId4"/>
+                <asvg:svgBlip xmlns:asvg="http://schemas.microsoft.com/office/drawing/2016/SVG/main" r:embed="rId5"/>
               </a:ext>
             </a:extLst>
           </a:blip>
@@ -6206,10 +8695,10 @@
           <p:nvPr/>
         </p:nvPicPr>
         <p:blipFill>
-          <a:blip>
+          <a:blip r:embed="rId4">
             <a:extLst>
               <a:ext uri="{96DAC541-7B7A-43D3-8B79-37D633B846F1}">
-                <asvg:svgBlip xmlns:asvg="http://schemas.microsoft.com/office/drawing/2016/SVG/main" r:embed="rId4"/>
+                <asvg:svgBlip xmlns:asvg="http://schemas.microsoft.com/office/drawing/2016/SVG/main" r:embed="rId5"/>
               </a:ext>
             </a:extLst>
           </a:blip>
@@ -7050,252 +9539,7 @@
           <p:nvPr/>
         </p:nvPicPr>
         <p:blipFill>
-          <a:blip>
-            <a:extLst>
-              <a:ext uri="{96DAC541-7B7A-43D3-8B79-37D633B846F1}">
-                <asvg:svgBlip xmlns:asvg="http://schemas.microsoft.com/office/drawing/2016/SVG/main" r:embed="rId4"/>
-              </a:ext>
-            </a:extLst>
-          </a:blip>
-          <a:stretch>
-            <a:fillRect/>
-          </a:stretch>
-        </p:blipFill>
-        <p:spPr>
-          <a:xfrm>
-            <a:off x="1638300" y="6021586"/>
-            <a:ext cx="285750" cy="285750"/>
-          </a:xfrm>
-          <a:prstGeom prst="rect">
-            <a:avLst/>
-          </a:prstGeom>
-        </p:spPr>
-      </p:pic>
-      <p:sp>
-        <p:nvSpPr>
-          <p:cNvPr id="21" name="Text 18"/>
-          <p:cNvSpPr/>
-          <p:nvPr/>
-        </p:nvSpPr>
-        <p:spPr>
-          <a:xfrm>
-            <a:off x="2076450" y="5991225"/>
-            <a:ext cx="3709690" cy="384721"/>
-          </a:xfrm>
-          <a:prstGeom prst="rect">
-            <a:avLst/>
-          </a:prstGeom>
-          <a:noFill/>
-          <a:ln/>
-        </p:spPr>
-        <p:txBody>
-          <a:bodyPr wrap="square" lIns="25400" tIns="25400" rIns="25400" bIns="25400" rtlCol="0" anchor="t">
-            <a:normAutofit fontScale="92500" lnSpcReduction="10000"/>
-          </a:bodyPr>
-          <a:lstStyle/>
-          <a:p>
-            <a:pPr marL="0" indent="0" algn="l">
-              <a:lnSpc>
-                <a:spcPct val="140000"/>
-              </a:lnSpc>
-              <a:buNone/>
-            </a:pPr>
-            <a:r>
-              <a:rPr lang="en-US" sz="1950" b="1" dirty="0">
-                <a:solidFill>
-                  <a:srgbClr val="4A4A4A"/>
-                </a:solidFill>
-                <a:latin typeface="맑은 고딕" panose="020B0503020000020004" pitchFamily="50" charset="-127"/>
-                <a:ea typeface="맑은 고딕" panose="020B0503020000020004" pitchFamily="50" charset="-127"/>
-                <a:cs typeface="Pretendard" pitchFamily="34" charset="-120"/>
-              </a:rPr>
-              <a:t>Owner</a:t>
-            </a:r>
-            <a:r>
-              <a:rPr lang="en-US" sz="1950" dirty="0">
-                <a:solidFill>
-                  <a:srgbClr val="6E6A60"/>
-                </a:solidFill>
-                <a:latin typeface="맑은 고딕" panose="020B0503020000020004" pitchFamily="50" charset="-127"/>
-                <a:ea typeface="맑은 고딕" panose="020B0503020000020004" pitchFamily="50" charset="-127"/>
-                <a:cs typeface="Pretendard" pitchFamily="34" charset="-120"/>
-              </a:rPr>
-              <a:t>만 정산을 시작할 수 있어요</a:t>
-            </a:r>
-            <a:endParaRPr lang="en-US" sz="1950" dirty="0">
-              <a:latin typeface="맑은 고딕" panose="020B0503020000020004" pitchFamily="50" charset="-127"/>
-            </a:endParaRPr>
-          </a:p>
-        </p:txBody>
-      </p:sp>
-      <p:sp>
-        <p:nvSpPr>
-          <p:cNvPr id="22" name="Text 19"/>
-          <p:cNvSpPr/>
-          <p:nvPr/>
-        </p:nvSpPr>
-        <p:spPr>
-          <a:xfrm>
-            <a:off x="7111901" y="3000375"/>
-            <a:ext cx="1129903" cy="381000"/>
-          </a:xfrm>
-          <a:prstGeom prst="rect">
-            <a:avLst/>
-          </a:prstGeom>
-          <a:noFill/>
-          <a:ln/>
-        </p:spPr>
-        <p:txBody>
-          <a:bodyPr wrap="square" lIns="25400" tIns="25400" rIns="25400" bIns="25400" rtlCol="0" anchor="t">
-            <a:normAutofit fontScale="85000" lnSpcReduction="10000"/>
-          </a:bodyPr>
-          <a:lstStyle/>
-          <a:p>
-            <a:pPr marL="0" indent="0" algn="l">
-              <a:buNone/>
-            </a:pPr>
-            <a:r>
-              <a:rPr lang="en-US" sz="2250" b="1" dirty="0">
-                <a:solidFill>
-                  <a:srgbClr val="4A4A4A"/>
-                </a:solidFill>
-                <a:latin typeface="맑은 고딕" panose="020B0503020000020004" pitchFamily="50" charset="-127"/>
-                <a:ea typeface="맑은 고딕" panose="020B0503020000020004" pitchFamily="50" charset="-127"/>
-                <a:cs typeface="Pretendard" pitchFamily="34" charset="-120"/>
-              </a:rPr>
-              <a:t>최소 송금</a:t>
-            </a:r>
-            <a:endParaRPr lang="en-US" sz="2250" dirty="0">
-              <a:latin typeface="맑은 고딕" panose="020B0503020000020004" pitchFamily="50" charset="-127"/>
-            </a:endParaRPr>
-          </a:p>
-        </p:txBody>
-      </p:sp>
-      <p:sp>
-        <p:nvSpPr>
-          <p:cNvPr id="23" name="Text 20"/>
-          <p:cNvSpPr/>
-          <p:nvPr/>
-        </p:nvSpPr>
-        <p:spPr>
-          <a:xfrm>
-            <a:off x="13302109" y="3019425"/>
-            <a:ext cx="1523985" cy="381000"/>
-          </a:xfrm>
-          <a:prstGeom prst="rect">
-            <a:avLst/>
-          </a:prstGeom>
-          <a:noFill/>
-          <a:ln/>
-        </p:spPr>
-        <p:txBody>
-          <a:bodyPr wrap="square" lIns="25400" tIns="25400" rIns="25400" bIns="25400" rtlCol="0" anchor="t">
-            <a:normAutofit/>
-          </a:bodyPr>
-          <a:lstStyle/>
-          <a:p>
-            <a:pPr marL="0" indent="0" algn="l">
-              <a:buNone/>
-            </a:pPr>
-            <a:r>
-              <a:rPr lang="en-US" sz="1800" dirty="0">
-                <a:solidFill>
-                  <a:srgbClr val="9A9486"/>
-                </a:solidFill>
-                <a:latin typeface="Microsoft YaHei" panose="020B0503020204020204" pitchFamily="34" charset="-122"/>
-                <a:ea typeface="Microsoft YaHei" panose="020B0503020204020204" pitchFamily="34" charset="-122"/>
-                <a:cs typeface="Space Mono" pitchFamily="34" charset="-120"/>
-              </a:rPr>
-              <a:t>10건 → 3건</a:t>
-            </a:r>
-            <a:endParaRPr lang="en-US" sz="1800" dirty="0">
-              <a:latin typeface="맑은 고딕" panose="020B0503020000020004" pitchFamily="50" charset="-127"/>
-            </a:endParaRPr>
-          </a:p>
-        </p:txBody>
-      </p:sp>
-      <p:sp>
-        <p:nvSpPr>
-          <p:cNvPr id="24" name="Shape 21"/>
-          <p:cNvSpPr/>
-          <p:nvPr/>
-        </p:nvSpPr>
-        <p:spPr>
-          <a:xfrm>
-            <a:off x="7111901" y="3552825"/>
-            <a:ext cx="7575649" cy="771525"/>
-          </a:xfrm>
-          <a:prstGeom prst="roundRect">
-            <a:avLst>
-              <a:gd name="adj" fmla="val 19753"/>
-            </a:avLst>
-          </a:prstGeom>
-          <a:solidFill>
-            <a:srgbClr val="ECE9DD"/>
-          </a:solidFill>
-          <a:ln/>
-        </p:spPr>
-        <p:txBody>
-          <a:bodyPr/>
-          <a:lstStyle/>
-          <a:p>
-            <a:endParaRPr lang="ko-KR" altLang="en-US"/>
-          </a:p>
-        </p:txBody>
-      </p:sp>
-      <p:sp>
-        <p:nvSpPr>
-          <p:cNvPr id="25" name="Text 22"/>
-          <p:cNvSpPr/>
-          <p:nvPr/>
-        </p:nvSpPr>
-        <p:spPr>
-          <a:xfrm>
-            <a:off x="7340501" y="3781425"/>
-            <a:ext cx="743099" cy="352425"/>
-          </a:xfrm>
-          <a:prstGeom prst="rect">
-            <a:avLst/>
-          </a:prstGeom>
-          <a:noFill/>
-          <a:ln/>
-        </p:spPr>
-        <p:txBody>
-          <a:bodyPr wrap="square" lIns="25400" tIns="25400" rIns="25400" bIns="25400" rtlCol="0" anchor="t">
-            <a:normAutofit fontScale="85000" lnSpcReduction="10000"/>
-          </a:bodyPr>
-          <a:lstStyle/>
-          <a:p>
-            <a:pPr marL="0" indent="0" algn="l">
-              <a:buNone/>
-            </a:pPr>
-            <a:r>
-              <a:rPr lang="en-US" sz="2025" b="1" dirty="0">
-                <a:solidFill>
-                  <a:srgbClr val="6E6A60"/>
-                </a:solidFill>
-                <a:latin typeface="맑은 고딕" panose="020B0503020000020004" pitchFamily="50" charset="-127"/>
-                <a:ea typeface="맑은 고딕" panose="020B0503020000020004" pitchFamily="50" charset="-127"/>
-                <a:cs typeface="Pretendard" pitchFamily="34" charset="-120"/>
-              </a:rPr>
-              <a:t>정희성</a:t>
-            </a:r>
-            <a:endParaRPr lang="en-US" sz="2025" dirty="0">
-              <a:latin typeface="맑은 고딕" panose="020B0503020000020004" pitchFamily="50" charset="-127"/>
-            </a:endParaRPr>
-          </a:p>
-        </p:txBody>
-      </p:sp>
-      <p:pic>
-        <p:nvPicPr>
-          <p:cNvPr id="26" name="Image 1" descr="preencoded.png"/>
-          <p:cNvPicPr>
-            <a:picLocks noChangeAspect="1"/>
-          </p:cNvPicPr>
-          <p:nvPr/>
-        </p:nvPicPr>
-        <p:blipFill>
-          <a:blip>
+          <a:blip r:embed="rId4">
             <a:extLst>
               <a:ext uri="{96DAC541-7B7A-43D3-8B79-37D633B846F1}">
                 <asvg:svgBlip xmlns:asvg="http://schemas.microsoft.com/office/drawing/2016/SVG/main" r:embed="rId5"/>
@@ -7308,8 +9552,8 @@
         </p:blipFill>
         <p:spPr>
           <a:xfrm>
-            <a:off x="8121700" y="3833812"/>
-            <a:ext cx="209550" cy="209550"/>
+            <a:off x="1638300" y="6021586"/>
+            <a:ext cx="285750" cy="285750"/>
           </a:xfrm>
           <a:prstGeom prst="rect">
             <a:avLst/>
@@ -7318,14 +9562,71 @@
       </p:pic>
       <p:sp>
         <p:nvSpPr>
-          <p:cNvPr id="27" name="Text 23"/>
-          <p:cNvSpPr/>
-          <p:nvPr/>
-        </p:nvSpPr>
-        <p:spPr>
-          <a:xfrm>
-            <a:off x="8445550" y="3781425"/>
-            <a:ext cx="743099" cy="352425"/>
+          <p:cNvPr id="21" name="Text 18"/>
+          <p:cNvSpPr/>
+          <p:nvPr/>
+        </p:nvSpPr>
+        <p:spPr>
+          <a:xfrm>
+            <a:off x="2076450" y="5991225"/>
+            <a:ext cx="3709690" cy="384721"/>
+          </a:xfrm>
+          <a:prstGeom prst="rect">
+            <a:avLst/>
+          </a:prstGeom>
+          <a:noFill/>
+          <a:ln/>
+        </p:spPr>
+        <p:txBody>
+          <a:bodyPr wrap="square" lIns="25400" tIns="25400" rIns="25400" bIns="25400" rtlCol="0" anchor="t">
+            <a:normAutofit fontScale="92500" lnSpcReduction="10000"/>
+          </a:bodyPr>
+          <a:lstStyle/>
+          <a:p>
+            <a:pPr marL="0" indent="0" algn="l">
+              <a:lnSpc>
+                <a:spcPct val="140000"/>
+              </a:lnSpc>
+              <a:buNone/>
+            </a:pPr>
+            <a:r>
+              <a:rPr lang="en-US" sz="1950" b="1" dirty="0">
+                <a:solidFill>
+                  <a:srgbClr val="4A4A4A"/>
+                </a:solidFill>
+                <a:latin typeface="맑은 고딕" panose="020B0503020000020004" pitchFamily="50" charset="-127"/>
+                <a:ea typeface="맑은 고딕" panose="020B0503020000020004" pitchFamily="50" charset="-127"/>
+                <a:cs typeface="Pretendard" pitchFamily="34" charset="-120"/>
+              </a:rPr>
+              <a:t>Owner</a:t>
+            </a:r>
+            <a:r>
+              <a:rPr lang="en-US" sz="1950" dirty="0">
+                <a:solidFill>
+                  <a:srgbClr val="6E6A60"/>
+                </a:solidFill>
+                <a:latin typeface="맑은 고딕" panose="020B0503020000020004" pitchFamily="50" charset="-127"/>
+                <a:ea typeface="맑은 고딕" panose="020B0503020000020004" pitchFamily="50" charset="-127"/>
+                <a:cs typeface="Pretendard" pitchFamily="34" charset="-120"/>
+              </a:rPr>
+              <a:t>만 정산을 시작할 수 있어요</a:t>
+            </a:r>
+            <a:endParaRPr lang="en-US" sz="1950" dirty="0">
+              <a:latin typeface="맑은 고딕" panose="020B0503020000020004" pitchFamily="50" charset="-127"/>
+            </a:endParaRPr>
+          </a:p>
+        </p:txBody>
+      </p:sp>
+      <p:sp>
+        <p:nvSpPr>
+          <p:cNvPr id="22" name="Text 19"/>
+          <p:cNvSpPr/>
+          <p:nvPr/>
+        </p:nvSpPr>
+        <p:spPr>
+          <a:xfrm>
+            <a:off x="7111901" y="3000375"/>
+            <a:ext cx="1129903" cy="381000"/>
           </a:xfrm>
           <a:prstGeom prst="rect">
             <a:avLst/>
@@ -7343,7 +9644,7 @@
               <a:buNone/>
             </a:pPr>
             <a:r>
-              <a:rPr lang="en-US" sz="2025" b="1" dirty="0">
+              <a:rPr lang="en-US" sz="2250" b="1" dirty="0">
                 <a:solidFill>
                   <a:srgbClr val="4A4A4A"/>
                 </a:solidFill>
@@ -7351,24 +9652,24 @@
                 <a:ea typeface="맑은 고딕" panose="020B0503020000020004" pitchFamily="50" charset="-127"/>
                 <a:cs typeface="Pretendard" pitchFamily="34" charset="-120"/>
               </a:rPr>
-              <a:t>김민준</a:t>
-            </a:r>
-            <a:endParaRPr lang="en-US" sz="2025" dirty="0">
-              <a:latin typeface="맑은 고딕" panose="020B0503020000020004" pitchFamily="50" charset="-127"/>
-            </a:endParaRPr>
-          </a:p>
-        </p:txBody>
-      </p:sp>
-      <p:sp>
-        <p:nvSpPr>
-          <p:cNvPr id="28" name="Text 24"/>
-          <p:cNvSpPr/>
-          <p:nvPr/>
-        </p:nvSpPr>
-        <p:spPr>
-          <a:xfrm>
-            <a:off x="9702701" y="3767138"/>
-            <a:ext cx="1404640" cy="381000"/>
+              <a:t>최소 송금</a:t>
+            </a:r>
+            <a:endParaRPr lang="en-US" sz="2250" dirty="0">
+              <a:latin typeface="맑은 고딕" panose="020B0503020000020004" pitchFamily="50" charset="-127"/>
+            </a:endParaRPr>
+          </a:p>
+        </p:txBody>
+      </p:sp>
+      <p:sp>
+        <p:nvSpPr>
+          <p:cNvPr id="23" name="Text 20"/>
+          <p:cNvSpPr/>
+          <p:nvPr/>
+        </p:nvSpPr>
+        <p:spPr>
+          <a:xfrm>
+            <a:off x="13302109" y="3019425"/>
+            <a:ext cx="1523985" cy="381000"/>
           </a:xfrm>
           <a:prstGeom prst="rect">
             <a:avLst/>
@@ -7378,7 +9679,7 @@
         </p:spPr>
         <p:txBody>
           <a:bodyPr wrap="square" lIns="25400" tIns="25400" rIns="25400" bIns="25400" rtlCol="0" anchor="t">
-            <a:normAutofit lnSpcReduction="10000"/>
+            <a:normAutofit/>
           </a:bodyPr>
           <a:lstStyle/>
           <a:p>
@@ -7386,87 +9687,15 @@
               <a:buNone/>
             </a:pPr>
             <a:r>
-              <a:rPr lang="en-US" sz="2250" b="1" dirty="0">
-                <a:solidFill>
-                  <a:srgbClr val="4A4A4A"/>
-                </a:solidFill>
-                <a:latin typeface="맑은 고딕" panose="020B0503020000020004" pitchFamily="50" charset="-127"/>
-                <a:ea typeface="맑은 고딕" panose="020B0503020000020004" pitchFamily="50" charset="-127"/>
-                <a:cs typeface="Pretendard" pitchFamily="34" charset="-120"/>
-              </a:rPr>
-              <a:t>₩24,000</a:t>
-            </a:r>
-            <a:endParaRPr lang="en-US" sz="2250" dirty="0">
-              <a:latin typeface="맑은 고딕" panose="020B0503020000020004" pitchFamily="50" charset="-127"/>
-            </a:endParaRPr>
-          </a:p>
-        </p:txBody>
-      </p:sp>
-      <p:sp>
-        <p:nvSpPr>
-          <p:cNvPr id="29" name="Shape 25"/>
-          <p:cNvSpPr/>
-          <p:nvPr/>
-        </p:nvSpPr>
-        <p:spPr>
-          <a:xfrm>
-            <a:off x="12887623" y="3724275"/>
-            <a:ext cx="738039" cy="428625"/>
-          </a:xfrm>
-          <a:prstGeom prst="roundRect">
-            <a:avLst>
-              <a:gd name="adj" fmla="val 50000"/>
-            </a:avLst>
-          </a:prstGeom>
-          <a:solidFill>
-            <a:srgbClr val="8AA6C0"/>
-          </a:solidFill>
-          <a:ln/>
-        </p:spPr>
-        <p:txBody>
-          <a:bodyPr/>
-          <a:lstStyle/>
-          <a:p>
-            <a:endParaRPr lang="ko-KR" altLang="en-US"/>
-          </a:p>
-        </p:txBody>
-      </p:sp>
-      <p:sp>
-        <p:nvSpPr>
-          <p:cNvPr id="30" name="Text 26"/>
-          <p:cNvSpPr/>
-          <p:nvPr/>
-        </p:nvSpPr>
-        <p:spPr>
-          <a:xfrm>
-            <a:off x="13059073" y="3800475"/>
-            <a:ext cx="471339" cy="314325"/>
-          </a:xfrm>
-          <a:prstGeom prst="rect">
-            <a:avLst/>
-          </a:prstGeom>
-          <a:noFill/>
-          <a:ln/>
-        </p:spPr>
-        <p:txBody>
-          <a:bodyPr wrap="square" lIns="25400" tIns="25400" rIns="25400" bIns="25400" rtlCol="0" anchor="t">
-            <a:normAutofit fontScale="85000" lnSpcReduction="10000"/>
-          </a:bodyPr>
-          <a:lstStyle/>
-          <a:p>
-            <a:pPr marL="0" indent="0" algn="l">
-              <a:buNone/>
-            </a:pPr>
-            <a:r>
-              <a:rPr lang="en-US" sz="1800" b="1" dirty="0">
-                <a:solidFill>
-                  <a:srgbClr val="FBF8EF"/>
-                </a:solidFill>
-                <a:latin typeface="맑은 고딕" panose="020B0503020000020004" pitchFamily="50" charset="-127"/>
-                <a:ea typeface="맑은 고딕" panose="020B0503020000020004" pitchFamily="50" charset="-127"/>
-                <a:cs typeface="Pretendard" pitchFamily="34" charset="-120"/>
-              </a:rPr>
-              <a:t>토스</a:t>
+              <a:rPr lang="en-US" sz="1800" dirty="0">
+                <a:solidFill>
+                  <a:srgbClr val="9A9486"/>
+                </a:solidFill>
+                <a:latin typeface="Microsoft YaHei" panose="020B0503020204020204" pitchFamily="34" charset="-122"/>
+                <a:ea typeface="Microsoft YaHei" panose="020B0503020204020204" pitchFamily="34" charset="-122"/>
+                <a:cs typeface="Space Mono" pitchFamily="34" charset="-120"/>
+              </a:rPr>
+              <a:t>10건 → 3건</a:t>
             </a:r>
             <a:endParaRPr lang="en-US" sz="1800" dirty="0">
               <a:latin typeface="맑은 고딕" panose="020B0503020000020004" pitchFamily="50" charset="-127"/>
@@ -7476,85 +9705,13 @@
       </p:sp>
       <p:sp>
         <p:nvSpPr>
-          <p:cNvPr id="31" name="Shape 27"/>
-          <p:cNvSpPr/>
-          <p:nvPr/>
-        </p:nvSpPr>
-        <p:spPr>
-          <a:xfrm>
-            <a:off x="13720911" y="3724275"/>
-            <a:ext cx="738039" cy="428625"/>
-          </a:xfrm>
-          <a:prstGeom prst="roundRect">
-            <a:avLst>
-              <a:gd name="adj" fmla="val 50000"/>
-            </a:avLst>
-          </a:prstGeom>
-          <a:solidFill>
-            <a:srgbClr val="6F9472"/>
-          </a:solidFill>
-          <a:ln/>
-        </p:spPr>
-        <p:txBody>
-          <a:bodyPr/>
-          <a:lstStyle/>
-          <a:p>
-            <a:endParaRPr lang="ko-KR" altLang="en-US"/>
-          </a:p>
-        </p:txBody>
-      </p:sp>
-      <p:sp>
-        <p:nvSpPr>
-          <p:cNvPr id="32" name="Text 28"/>
-          <p:cNvSpPr/>
-          <p:nvPr/>
-        </p:nvSpPr>
-        <p:spPr>
-          <a:xfrm>
-            <a:off x="13892361" y="3800475"/>
-            <a:ext cx="471339" cy="314325"/>
-          </a:xfrm>
-          <a:prstGeom prst="rect">
-            <a:avLst/>
-          </a:prstGeom>
-          <a:noFill/>
-          <a:ln/>
-        </p:spPr>
-        <p:txBody>
-          <a:bodyPr wrap="square" lIns="25400" tIns="25400" rIns="25400" bIns="25400" rtlCol="0" anchor="t">
-            <a:normAutofit fontScale="85000" lnSpcReduction="10000"/>
-          </a:bodyPr>
-          <a:lstStyle/>
-          <a:p>
-            <a:pPr marL="0" indent="0" algn="l">
-              <a:buNone/>
-            </a:pPr>
-            <a:r>
-              <a:rPr lang="en-US" sz="1800" b="1" dirty="0">
-                <a:solidFill>
-                  <a:srgbClr val="FBF8EF"/>
-                </a:solidFill>
-                <a:latin typeface="맑은 고딕" panose="020B0503020000020004" pitchFamily="50" charset="-127"/>
-                <a:ea typeface="맑은 고딕" panose="020B0503020000020004" pitchFamily="50" charset="-127"/>
-                <a:cs typeface="Pretendard" pitchFamily="34" charset="-120"/>
-              </a:rPr>
-              <a:t>완료</a:t>
-            </a:r>
-            <a:endParaRPr lang="en-US" sz="1800" dirty="0">
-              <a:latin typeface="맑은 고딕" panose="020B0503020000020004" pitchFamily="50" charset="-127"/>
-            </a:endParaRPr>
-          </a:p>
-        </p:txBody>
-      </p:sp>
-      <p:sp>
-        <p:nvSpPr>
-          <p:cNvPr id="33" name="Shape 29"/>
-          <p:cNvSpPr/>
-          <p:nvPr/>
-        </p:nvSpPr>
-        <p:spPr>
-          <a:xfrm>
-            <a:off x="7111901" y="4476750"/>
+          <p:cNvPr id="24" name="Shape 21"/>
+          <p:cNvSpPr/>
+          <p:nvPr/>
+        </p:nvSpPr>
+        <p:spPr>
+          <a:xfrm>
+            <a:off x="7111901" y="3552825"/>
             <a:ext cx="7575649" cy="771525"/>
           </a:xfrm>
           <a:prstGeom prst="roundRect">
@@ -7577,13 +9734,13 @@
       </p:sp>
       <p:sp>
         <p:nvSpPr>
-          <p:cNvPr id="34" name="Text 30"/>
-          <p:cNvSpPr/>
-          <p:nvPr/>
-        </p:nvSpPr>
-        <p:spPr>
-          <a:xfrm>
-            <a:off x="7340501" y="4705350"/>
+          <p:cNvPr id="25" name="Text 22"/>
+          <p:cNvSpPr/>
+          <p:nvPr/>
+        </p:nvSpPr>
+        <p:spPr>
+          <a:xfrm>
+            <a:off x="7340501" y="3781425"/>
             <a:ext cx="743099" cy="352425"/>
           </a:xfrm>
           <a:prstGeom prst="rect">
@@ -7602,7 +9759,7 @@
               <a:buNone/>
             </a:pPr>
             <a:r>
-              <a:rPr lang="ko-KR" altLang="en-US" sz="2025" b="1" dirty="0" err="1">
+              <a:rPr lang="en-US" sz="2025" b="1" dirty="0">
                 <a:solidFill>
                   <a:srgbClr val="6E6A60"/>
                 </a:solidFill>
@@ -7610,7 +9767,7 @@
                 <a:ea typeface="맑은 고딕" panose="020B0503020000020004" pitchFamily="50" charset="-127"/>
                 <a:cs typeface="Pretendard" pitchFamily="34" charset="-120"/>
               </a:rPr>
-              <a:t>김싸피</a:t>
+              <a:t>정희성</a:t>
             </a:r>
             <a:endParaRPr lang="en-US" sz="2025" dirty="0">
               <a:latin typeface="맑은 고딕" panose="020B0503020000020004" pitchFamily="50" charset="-127"/>
@@ -7620,17 +9777,17 @@
       </p:sp>
       <p:pic>
         <p:nvPicPr>
-          <p:cNvPr id="35" name="Image 2" descr="preencoded.png"/>
+          <p:cNvPr id="26" name="Image 1" descr="preencoded.png"/>
           <p:cNvPicPr>
             <a:picLocks noChangeAspect="1"/>
           </p:cNvPicPr>
           <p:nvPr/>
         </p:nvPicPr>
         <p:blipFill>
-          <a:blip>
+          <a:blip r:embed="rId6">
             <a:extLst>
               <a:ext uri="{96DAC541-7B7A-43D3-8B79-37D633B846F1}">
-                <asvg:svgBlip xmlns:asvg="http://schemas.microsoft.com/office/drawing/2016/SVG/main" r:embed="rId6"/>
+                <asvg:svgBlip xmlns:asvg="http://schemas.microsoft.com/office/drawing/2016/SVG/main" r:embed="rId7"/>
               </a:ext>
             </a:extLst>
           </a:blip>
@@ -7640,6 +9797,338 @@
         </p:blipFill>
         <p:spPr>
           <a:xfrm>
+            <a:off x="8121700" y="3833812"/>
+            <a:ext cx="209550" cy="209550"/>
+          </a:xfrm>
+          <a:prstGeom prst="rect">
+            <a:avLst/>
+          </a:prstGeom>
+        </p:spPr>
+      </p:pic>
+      <p:sp>
+        <p:nvSpPr>
+          <p:cNvPr id="27" name="Text 23"/>
+          <p:cNvSpPr/>
+          <p:nvPr/>
+        </p:nvSpPr>
+        <p:spPr>
+          <a:xfrm>
+            <a:off x="8445550" y="3781425"/>
+            <a:ext cx="743099" cy="352425"/>
+          </a:xfrm>
+          <a:prstGeom prst="rect">
+            <a:avLst/>
+          </a:prstGeom>
+          <a:noFill/>
+          <a:ln/>
+        </p:spPr>
+        <p:txBody>
+          <a:bodyPr wrap="square" lIns="25400" tIns="25400" rIns="25400" bIns="25400" rtlCol="0" anchor="t">
+            <a:normAutofit fontScale="85000" lnSpcReduction="10000"/>
+          </a:bodyPr>
+          <a:lstStyle/>
+          <a:p>
+            <a:pPr marL="0" indent="0" algn="l">
+              <a:buNone/>
+            </a:pPr>
+            <a:r>
+              <a:rPr lang="en-US" sz="2025" b="1" dirty="0">
+                <a:solidFill>
+                  <a:srgbClr val="4A4A4A"/>
+                </a:solidFill>
+                <a:latin typeface="맑은 고딕" panose="020B0503020000020004" pitchFamily="50" charset="-127"/>
+                <a:ea typeface="맑은 고딕" panose="020B0503020000020004" pitchFamily="50" charset="-127"/>
+                <a:cs typeface="Pretendard" pitchFamily="34" charset="-120"/>
+              </a:rPr>
+              <a:t>김민준</a:t>
+            </a:r>
+            <a:endParaRPr lang="en-US" sz="2025" dirty="0">
+              <a:latin typeface="맑은 고딕" panose="020B0503020000020004" pitchFamily="50" charset="-127"/>
+            </a:endParaRPr>
+          </a:p>
+        </p:txBody>
+      </p:sp>
+      <p:sp>
+        <p:nvSpPr>
+          <p:cNvPr id="28" name="Text 24"/>
+          <p:cNvSpPr/>
+          <p:nvPr/>
+        </p:nvSpPr>
+        <p:spPr>
+          <a:xfrm>
+            <a:off x="9702701" y="3767138"/>
+            <a:ext cx="1404640" cy="381000"/>
+          </a:xfrm>
+          <a:prstGeom prst="rect">
+            <a:avLst/>
+          </a:prstGeom>
+          <a:noFill/>
+          <a:ln/>
+        </p:spPr>
+        <p:txBody>
+          <a:bodyPr wrap="square" lIns="25400" tIns="25400" rIns="25400" bIns="25400" rtlCol="0" anchor="t">
+            <a:normAutofit lnSpcReduction="10000"/>
+          </a:bodyPr>
+          <a:lstStyle/>
+          <a:p>
+            <a:pPr marL="0" indent="0" algn="l">
+              <a:buNone/>
+            </a:pPr>
+            <a:r>
+              <a:rPr lang="en-US" sz="2250" b="1" dirty="0">
+                <a:solidFill>
+                  <a:srgbClr val="4A4A4A"/>
+                </a:solidFill>
+                <a:latin typeface="맑은 고딕" panose="020B0503020000020004" pitchFamily="50" charset="-127"/>
+                <a:ea typeface="맑은 고딕" panose="020B0503020000020004" pitchFamily="50" charset="-127"/>
+                <a:cs typeface="Pretendard" pitchFamily="34" charset="-120"/>
+              </a:rPr>
+              <a:t>₩24,000</a:t>
+            </a:r>
+            <a:endParaRPr lang="en-US" sz="2250" dirty="0">
+              <a:latin typeface="맑은 고딕" panose="020B0503020000020004" pitchFamily="50" charset="-127"/>
+            </a:endParaRPr>
+          </a:p>
+        </p:txBody>
+      </p:sp>
+      <p:sp>
+        <p:nvSpPr>
+          <p:cNvPr id="29" name="Shape 25"/>
+          <p:cNvSpPr/>
+          <p:nvPr/>
+        </p:nvSpPr>
+        <p:spPr>
+          <a:xfrm>
+            <a:off x="12887623" y="3724275"/>
+            <a:ext cx="738039" cy="428625"/>
+          </a:xfrm>
+          <a:prstGeom prst="roundRect">
+            <a:avLst>
+              <a:gd name="adj" fmla="val 50000"/>
+            </a:avLst>
+          </a:prstGeom>
+          <a:solidFill>
+            <a:srgbClr val="8AA6C0"/>
+          </a:solidFill>
+          <a:ln/>
+        </p:spPr>
+        <p:txBody>
+          <a:bodyPr/>
+          <a:lstStyle/>
+          <a:p>
+            <a:endParaRPr lang="ko-KR" altLang="en-US"/>
+          </a:p>
+        </p:txBody>
+      </p:sp>
+      <p:sp>
+        <p:nvSpPr>
+          <p:cNvPr id="30" name="Text 26"/>
+          <p:cNvSpPr/>
+          <p:nvPr/>
+        </p:nvSpPr>
+        <p:spPr>
+          <a:xfrm>
+            <a:off x="13059073" y="3800475"/>
+            <a:ext cx="471339" cy="314325"/>
+          </a:xfrm>
+          <a:prstGeom prst="rect">
+            <a:avLst/>
+          </a:prstGeom>
+          <a:noFill/>
+          <a:ln/>
+        </p:spPr>
+        <p:txBody>
+          <a:bodyPr wrap="square" lIns="25400" tIns="25400" rIns="25400" bIns="25400" rtlCol="0" anchor="t">
+            <a:normAutofit fontScale="85000" lnSpcReduction="10000"/>
+          </a:bodyPr>
+          <a:lstStyle/>
+          <a:p>
+            <a:pPr marL="0" indent="0" algn="l">
+              <a:buNone/>
+            </a:pPr>
+            <a:r>
+              <a:rPr lang="en-US" sz="1800" b="1" dirty="0">
+                <a:solidFill>
+                  <a:srgbClr val="FBF8EF"/>
+                </a:solidFill>
+                <a:latin typeface="맑은 고딕" panose="020B0503020000020004" pitchFamily="50" charset="-127"/>
+                <a:ea typeface="맑은 고딕" panose="020B0503020000020004" pitchFamily="50" charset="-127"/>
+                <a:cs typeface="Pretendard" pitchFamily="34" charset="-120"/>
+              </a:rPr>
+              <a:t>토스</a:t>
+            </a:r>
+            <a:endParaRPr lang="en-US" sz="1800" dirty="0">
+              <a:latin typeface="맑은 고딕" panose="020B0503020000020004" pitchFamily="50" charset="-127"/>
+            </a:endParaRPr>
+          </a:p>
+        </p:txBody>
+      </p:sp>
+      <p:sp>
+        <p:nvSpPr>
+          <p:cNvPr id="31" name="Shape 27"/>
+          <p:cNvSpPr/>
+          <p:nvPr/>
+        </p:nvSpPr>
+        <p:spPr>
+          <a:xfrm>
+            <a:off x="13720911" y="3724275"/>
+            <a:ext cx="738039" cy="428625"/>
+          </a:xfrm>
+          <a:prstGeom prst="roundRect">
+            <a:avLst>
+              <a:gd name="adj" fmla="val 50000"/>
+            </a:avLst>
+          </a:prstGeom>
+          <a:solidFill>
+            <a:srgbClr val="6F9472"/>
+          </a:solidFill>
+          <a:ln/>
+        </p:spPr>
+        <p:txBody>
+          <a:bodyPr/>
+          <a:lstStyle/>
+          <a:p>
+            <a:endParaRPr lang="ko-KR" altLang="en-US"/>
+          </a:p>
+        </p:txBody>
+      </p:sp>
+      <p:sp>
+        <p:nvSpPr>
+          <p:cNvPr id="32" name="Text 28"/>
+          <p:cNvSpPr/>
+          <p:nvPr/>
+        </p:nvSpPr>
+        <p:spPr>
+          <a:xfrm>
+            <a:off x="13892361" y="3800475"/>
+            <a:ext cx="471339" cy="314325"/>
+          </a:xfrm>
+          <a:prstGeom prst="rect">
+            <a:avLst/>
+          </a:prstGeom>
+          <a:noFill/>
+          <a:ln/>
+        </p:spPr>
+        <p:txBody>
+          <a:bodyPr wrap="square" lIns="25400" tIns="25400" rIns="25400" bIns="25400" rtlCol="0" anchor="t">
+            <a:normAutofit fontScale="85000" lnSpcReduction="10000"/>
+          </a:bodyPr>
+          <a:lstStyle/>
+          <a:p>
+            <a:pPr marL="0" indent="0" algn="l">
+              <a:buNone/>
+            </a:pPr>
+            <a:r>
+              <a:rPr lang="en-US" sz="1800" b="1" dirty="0">
+                <a:solidFill>
+                  <a:srgbClr val="FBF8EF"/>
+                </a:solidFill>
+                <a:latin typeface="맑은 고딕" panose="020B0503020000020004" pitchFamily="50" charset="-127"/>
+                <a:ea typeface="맑은 고딕" panose="020B0503020000020004" pitchFamily="50" charset="-127"/>
+                <a:cs typeface="Pretendard" pitchFamily="34" charset="-120"/>
+              </a:rPr>
+              <a:t>완료</a:t>
+            </a:r>
+            <a:endParaRPr lang="en-US" sz="1800" dirty="0">
+              <a:latin typeface="맑은 고딕" panose="020B0503020000020004" pitchFamily="50" charset="-127"/>
+            </a:endParaRPr>
+          </a:p>
+        </p:txBody>
+      </p:sp>
+      <p:sp>
+        <p:nvSpPr>
+          <p:cNvPr id="33" name="Shape 29"/>
+          <p:cNvSpPr/>
+          <p:nvPr/>
+        </p:nvSpPr>
+        <p:spPr>
+          <a:xfrm>
+            <a:off x="7111901" y="4476750"/>
+            <a:ext cx="7575649" cy="771525"/>
+          </a:xfrm>
+          <a:prstGeom prst="roundRect">
+            <a:avLst>
+              <a:gd name="adj" fmla="val 19753"/>
+            </a:avLst>
+          </a:prstGeom>
+          <a:solidFill>
+            <a:srgbClr val="ECE9DD"/>
+          </a:solidFill>
+          <a:ln/>
+        </p:spPr>
+        <p:txBody>
+          <a:bodyPr/>
+          <a:lstStyle/>
+          <a:p>
+            <a:endParaRPr lang="ko-KR" altLang="en-US"/>
+          </a:p>
+        </p:txBody>
+      </p:sp>
+      <p:sp>
+        <p:nvSpPr>
+          <p:cNvPr id="34" name="Text 30"/>
+          <p:cNvSpPr/>
+          <p:nvPr/>
+        </p:nvSpPr>
+        <p:spPr>
+          <a:xfrm>
+            <a:off x="7340501" y="4705350"/>
+            <a:ext cx="743099" cy="352425"/>
+          </a:xfrm>
+          <a:prstGeom prst="rect">
+            <a:avLst/>
+          </a:prstGeom>
+          <a:noFill/>
+          <a:ln/>
+        </p:spPr>
+        <p:txBody>
+          <a:bodyPr wrap="square" lIns="25400" tIns="25400" rIns="25400" bIns="25400" rtlCol="0" anchor="t">
+            <a:normAutofit fontScale="85000" lnSpcReduction="10000"/>
+          </a:bodyPr>
+          <a:lstStyle/>
+          <a:p>
+            <a:pPr marL="0" indent="0" algn="l">
+              <a:buNone/>
+            </a:pPr>
+            <a:r>
+              <a:rPr lang="ko-KR" altLang="en-US" sz="2025" b="1" dirty="0" err="1">
+                <a:solidFill>
+                  <a:srgbClr val="6E6A60"/>
+                </a:solidFill>
+                <a:latin typeface="맑은 고딕" panose="020B0503020000020004" pitchFamily="50" charset="-127"/>
+                <a:ea typeface="맑은 고딕" panose="020B0503020000020004" pitchFamily="50" charset="-127"/>
+                <a:cs typeface="Pretendard" pitchFamily="34" charset="-120"/>
+              </a:rPr>
+              <a:t>김싸피</a:t>
+            </a:r>
+            <a:endParaRPr lang="en-US" sz="2025" dirty="0">
+              <a:latin typeface="맑은 고딕" panose="020B0503020000020004" pitchFamily="50" charset="-127"/>
+            </a:endParaRPr>
+          </a:p>
+        </p:txBody>
+      </p:sp>
+      <p:pic>
+        <p:nvPicPr>
+          <p:cNvPr id="35" name="Image 2" descr="preencoded.png"/>
+          <p:cNvPicPr>
+            <a:picLocks noChangeAspect="1"/>
+          </p:cNvPicPr>
+          <p:nvPr/>
+        </p:nvPicPr>
+        <p:blipFill>
+          <a:blip r:embed="rId6">
+            <a:extLst>
+              <a:ext uri="{96DAC541-7B7A-43D3-8B79-37D633B846F1}">
+                <asvg:svgBlip xmlns:asvg="http://schemas.microsoft.com/office/drawing/2016/SVG/main" r:embed="rId8"/>
+              </a:ext>
+            </a:extLst>
+          </a:blip>
+          <a:stretch>
+            <a:fillRect/>
+          </a:stretch>
+        </p:blipFill>
+        <p:spPr>
+          <a:xfrm>
             <a:off x="8121700" y="4757738"/>
             <a:ext cx="209550" cy="209550"/>
           </a:xfrm>
@@ -7959,10 +10448,10 @@
           <p:nvPr/>
         </p:nvPicPr>
         <p:blipFill>
-          <a:blip>
+          <a:blip r:embed="rId6">
             <a:extLst>
               <a:ext uri="{96DAC541-7B7A-43D3-8B79-37D633B846F1}">
-                <asvg:svgBlip xmlns:asvg="http://schemas.microsoft.com/office/drawing/2016/SVG/main" r:embed="rId7"/>
+                <asvg:svgBlip xmlns:asvg="http://schemas.microsoft.com/office/drawing/2016/SVG/main" r:embed="rId9"/>
               </a:ext>
             </a:extLst>
           </a:blip>
@@ -9835,10 +12324,10 @@
           <p:nvPr/>
         </p:nvPicPr>
         <p:blipFill>
-          <a:blip>
+          <a:blip r:embed="rId4">
             <a:extLst>
               <a:ext uri="{96DAC541-7B7A-43D3-8B79-37D633B846F1}">
-                <asvg:svgBlip xmlns:asvg="http://schemas.microsoft.com/office/drawing/2016/SVG/main" r:embed="rId4"/>
+                <asvg:svgBlip xmlns:asvg="http://schemas.microsoft.com/office/drawing/2016/SVG/main" r:embed="rId5"/>
               </a:ext>
             </a:extLst>
           </a:blip>
@@ -12955,10 +15444,10 @@
           <p:nvPr/>
         </p:nvPicPr>
         <p:blipFill>
-          <a:blip>
+          <a:blip r:embed="rId11">
             <a:extLst>
               <a:ext uri="{96DAC541-7B7A-43D3-8B79-37D633B846F1}">
-                <asvg:svgBlip xmlns:asvg="http://schemas.microsoft.com/office/drawing/2016/SVG/main" r:embed="rId11"/>
+                <asvg:svgBlip xmlns:asvg="http://schemas.microsoft.com/office/drawing/2016/SVG/main" r:embed="rId12"/>
               </a:ext>
             </a:extLst>
           </a:blip>
@@ -13057,102 +15546,6 @@
           <p:nvPr/>
         </p:nvPicPr>
         <p:blipFill>
-          <a:blip r:embed="rId12"/>
-          <a:stretch>
-            <a:fillRect/>
-          </a:stretch>
-        </p:blipFill>
-        <p:spPr>
-          <a:xfrm>
-            <a:off x="1847850" y="6391275"/>
-            <a:ext cx="247650" cy="247650"/>
-          </a:xfrm>
-          <a:prstGeom prst="rect">
-            <a:avLst/>
-          </a:prstGeom>
-        </p:spPr>
-      </p:pic>
-      <p:sp>
-        <p:nvSpPr>
-          <p:cNvPr id="51" name="Text 37"/>
-          <p:cNvSpPr/>
-          <p:nvPr/>
-        </p:nvSpPr>
-        <p:spPr>
-          <a:xfrm>
-            <a:off x="2200275" y="6353175"/>
-            <a:ext cx="646658" cy="361950"/>
-          </a:xfrm>
-          <a:prstGeom prst="rect">
-            <a:avLst/>
-          </a:prstGeom>
-          <a:noFill/>
-          <a:ln/>
-        </p:spPr>
-        <p:txBody>
-          <a:bodyPr wrap="square" lIns="25400" tIns="25400" rIns="25400" bIns="25400" rtlCol="0" anchor="t">
-            <a:normAutofit lnSpcReduction="10000"/>
-          </a:bodyPr>
-          <a:lstStyle/>
-          <a:p>
-            <a:pPr marL="0" indent="0" algn="l">
-              <a:buNone/>
-            </a:pPr>
-            <a:r>
-              <a:rPr lang="en-US" sz="2100" b="1" dirty="0">
-                <a:solidFill>
-                  <a:srgbClr val="F3F0E6"/>
-                </a:solidFill>
-                <a:latin typeface="맑은 고딕" panose="020B0503020000020004" pitchFamily="50" charset="-127"/>
-                <a:ea typeface="맑은 고딕" panose="020B0503020000020004" pitchFamily="50" charset="-127"/>
-                <a:cs typeface="Pretendard" pitchFamily="34" charset="-120"/>
-              </a:rPr>
-              <a:t>JWT</a:t>
-            </a:r>
-            <a:endParaRPr lang="en-US" sz="2100" dirty="0">
-              <a:latin typeface="맑은 고딕" panose="020B0503020000020004" pitchFamily="50" charset="-127"/>
-            </a:endParaRPr>
-          </a:p>
-        </p:txBody>
-      </p:sp>
-      <p:sp>
-        <p:nvSpPr>
-          <p:cNvPr id="52" name="Shape 38"/>
-          <p:cNvSpPr/>
-          <p:nvPr/>
-        </p:nvSpPr>
-        <p:spPr>
-          <a:xfrm>
-            <a:off x="3113633" y="6257925"/>
-            <a:ext cx="1659285" cy="514350"/>
-          </a:xfrm>
-          <a:prstGeom prst="roundRect">
-            <a:avLst>
-              <a:gd name="adj" fmla="val 50000"/>
-            </a:avLst>
-          </a:prstGeom>
-          <a:solidFill>
-            <a:srgbClr val="55525B"/>
-          </a:solidFill>
-          <a:ln/>
-        </p:spPr>
-        <p:txBody>
-          <a:bodyPr/>
-          <a:lstStyle/>
-          <a:p>
-            <a:endParaRPr lang="ko-KR" altLang="en-US"/>
-          </a:p>
-        </p:txBody>
-      </p:sp>
-      <p:pic>
-        <p:nvPicPr>
-          <p:cNvPr id="53" name="Image 12" descr="preencoded.png"/>
-          <p:cNvPicPr>
-            <a:picLocks noChangeAspect="1"/>
-          </p:cNvPicPr>
-          <p:nvPr/>
-        </p:nvPicPr>
-        <p:blipFill>
           <a:blip r:embed="rId13"/>
           <a:stretch>
             <a:fillRect/>
@@ -13160,7 +15553,7 @@
         </p:blipFill>
         <p:spPr>
           <a:xfrm>
-            <a:off x="3266033" y="6391275"/>
+            <a:off x="1847850" y="6391275"/>
             <a:ext cx="247650" cy="247650"/>
           </a:xfrm>
           <a:prstGeom prst="rect">
@@ -13170,14 +15563,14 @@
       </p:pic>
       <p:sp>
         <p:nvSpPr>
-          <p:cNvPr id="54" name="Text 39"/>
-          <p:cNvSpPr/>
-          <p:nvPr/>
-        </p:nvSpPr>
-        <p:spPr>
-          <a:xfrm>
-            <a:off x="3618458" y="6353175"/>
-            <a:ext cx="1021110" cy="361950"/>
+          <p:cNvPr id="51" name="Text 37"/>
+          <p:cNvSpPr/>
+          <p:nvPr/>
+        </p:nvSpPr>
+        <p:spPr>
+          <a:xfrm>
+            <a:off x="2200275" y="6353175"/>
+            <a:ext cx="646658" cy="361950"/>
           </a:xfrm>
           <a:prstGeom prst="rect">
             <a:avLst/>
@@ -13187,7 +15580,7 @@
         </p:spPr>
         <p:txBody>
           <a:bodyPr wrap="square" lIns="25400" tIns="25400" rIns="25400" bIns="25400" rtlCol="0" anchor="t">
-            <a:normAutofit fontScale="92500"/>
+            <a:normAutofit lnSpcReduction="10000"/>
           </a:bodyPr>
           <a:lstStyle/>
           <a:p>
@@ -13203,7 +15596,7 @@
                 <a:ea typeface="맑은 고딕" panose="020B0503020000020004" pitchFamily="50" charset="-127"/>
                 <a:cs typeface="Pretendard" pitchFamily="34" charset="-120"/>
               </a:rPr>
-              <a:t>OAuth2</a:t>
+              <a:t>JWT</a:t>
             </a:r>
             <a:endParaRPr lang="en-US" sz="2100" dirty="0">
               <a:latin typeface="맑은 고딕" panose="020B0503020000020004" pitchFamily="50" charset="-127"/>
@@ -13213,14 +15606,14 @@
       </p:sp>
       <p:sp>
         <p:nvSpPr>
-          <p:cNvPr id="55" name="Shape 40"/>
-          <p:cNvSpPr/>
-          <p:nvPr/>
-        </p:nvSpPr>
-        <p:spPr>
-          <a:xfrm>
-            <a:off x="4906268" y="6257925"/>
-            <a:ext cx="1777901" cy="514350"/>
+          <p:cNvPr id="52" name="Shape 38"/>
+          <p:cNvSpPr/>
+          <p:nvPr/>
+        </p:nvSpPr>
+        <p:spPr>
+          <a:xfrm>
+            <a:off x="3113633" y="6257925"/>
+            <a:ext cx="1659285" cy="514350"/>
           </a:xfrm>
           <a:prstGeom prst="roundRect">
             <a:avLst>
@@ -13242,7 +15635,7 @@
       </p:sp>
       <p:pic>
         <p:nvPicPr>
-          <p:cNvPr id="56" name="Image 13" descr="preencoded.png"/>
+          <p:cNvPr id="53" name="Image 12" descr="preencoded.png"/>
           <p:cNvPicPr>
             <a:picLocks noChangeAspect="1"/>
           </p:cNvPicPr>
@@ -13256,6 +15649,102 @@
         </p:blipFill>
         <p:spPr>
           <a:xfrm>
+            <a:off x="3266033" y="6391275"/>
+            <a:ext cx="247650" cy="247650"/>
+          </a:xfrm>
+          <a:prstGeom prst="rect">
+            <a:avLst/>
+          </a:prstGeom>
+        </p:spPr>
+      </p:pic>
+      <p:sp>
+        <p:nvSpPr>
+          <p:cNvPr id="54" name="Text 39"/>
+          <p:cNvSpPr/>
+          <p:nvPr/>
+        </p:nvSpPr>
+        <p:spPr>
+          <a:xfrm>
+            <a:off x="3618458" y="6353175"/>
+            <a:ext cx="1021110" cy="361950"/>
+          </a:xfrm>
+          <a:prstGeom prst="rect">
+            <a:avLst/>
+          </a:prstGeom>
+          <a:noFill/>
+          <a:ln/>
+        </p:spPr>
+        <p:txBody>
+          <a:bodyPr wrap="square" lIns="25400" tIns="25400" rIns="25400" bIns="25400" rtlCol="0" anchor="t">
+            <a:normAutofit fontScale="92500"/>
+          </a:bodyPr>
+          <a:lstStyle/>
+          <a:p>
+            <a:pPr marL="0" indent="0" algn="l">
+              <a:buNone/>
+            </a:pPr>
+            <a:r>
+              <a:rPr lang="en-US" sz="2100" b="1" dirty="0">
+                <a:solidFill>
+                  <a:srgbClr val="F3F0E6"/>
+                </a:solidFill>
+                <a:latin typeface="맑은 고딕" panose="020B0503020000020004" pitchFamily="50" charset="-127"/>
+                <a:ea typeface="맑은 고딕" panose="020B0503020000020004" pitchFamily="50" charset="-127"/>
+                <a:cs typeface="Pretendard" pitchFamily="34" charset="-120"/>
+              </a:rPr>
+              <a:t>OAuth2</a:t>
+            </a:r>
+            <a:endParaRPr lang="en-US" sz="2100" dirty="0">
+              <a:latin typeface="맑은 고딕" panose="020B0503020000020004" pitchFamily="50" charset="-127"/>
+            </a:endParaRPr>
+          </a:p>
+        </p:txBody>
+      </p:sp>
+      <p:sp>
+        <p:nvSpPr>
+          <p:cNvPr id="55" name="Shape 40"/>
+          <p:cNvSpPr/>
+          <p:nvPr/>
+        </p:nvSpPr>
+        <p:spPr>
+          <a:xfrm>
+            <a:off x="4906268" y="6257925"/>
+            <a:ext cx="1777901" cy="514350"/>
+          </a:xfrm>
+          <a:prstGeom prst="roundRect">
+            <a:avLst>
+              <a:gd name="adj" fmla="val 50000"/>
+            </a:avLst>
+          </a:prstGeom>
+          <a:solidFill>
+            <a:srgbClr val="55525B"/>
+          </a:solidFill>
+          <a:ln/>
+        </p:spPr>
+        <p:txBody>
+          <a:bodyPr/>
+          <a:lstStyle/>
+          <a:p>
+            <a:endParaRPr lang="ko-KR" altLang="en-US"/>
+          </a:p>
+        </p:txBody>
+      </p:sp>
+      <p:pic>
+        <p:nvPicPr>
+          <p:cNvPr id="56" name="Image 13" descr="preencoded.png"/>
+          <p:cNvPicPr>
+            <a:picLocks noChangeAspect="1"/>
+          </p:cNvPicPr>
+          <p:nvPr/>
+        </p:nvPicPr>
+        <p:blipFill>
+          <a:blip r:embed="rId15"/>
+          <a:stretch>
+            <a:fillRect/>
+          </a:stretch>
+        </p:blipFill>
+        <p:spPr>
+          <a:xfrm>
             <a:off x="5058668" y="6391275"/>
             <a:ext cx="247650" cy="247650"/>
           </a:xfrm>
@@ -13345,7 +15834,7 @@
           <p:nvPr/>
         </p:nvPicPr>
         <p:blipFill>
-          <a:blip r:embed="rId15"/>
+          <a:blip r:embed="rId16"/>
           <a:stretch>
             <a:fillRect/>
           </a:stretch>
@@ -13539,10 +16028,10 @@
           <p:nvPr/>
         </p:nvPicPr>
         <p:blipFill>
-          <a:blip>
+          <a:blip r:embed="rId17">
             <a:extLst>
               <a:ext uri="{96DAC541-7B7A-43D3-8B79-37D633B846F1}">
-                <asvg:svgBlip xmlns:asvg="http://schemas.microsoft.com/office/drawing/2016/SVG/main" r:embed="rId16"/>
+                <asvg:svgBlip xmlns:asvg="http://schemas.microsoft.com/office/drawing/2016/SVG/main" r:embed="rId18"/>
               </a:ext>
             </a:extLst>
           </a:blip>
@@ -14859,109 +17348,7 @@
           <p:nvPr/>
         </p:nvPicPr>
         <p:blipFill>
-          <a:blip>
-            <a:extLst>
-              <a:ext uri="{96DAC541-7B7A-43D3-8B79-37D633B846F1}">
-                <asvg:svgBlip xmlns:asvg="http://schemas.microsoft.com/office/drawing/2016/SVG/main" r:embed="rId4"/>
-              </a:ext>
-            </a:extLst>
-          </a:blip>
-          <a:stretch>
-            <a:fillRect/>
-          </a:stretch>
-        </p:blipFill>
-        <p:spPr>
-          <a:xfrm rot="2700000">
-            <a:off x="9009638" y="3695197"/>
-            <a:ext cx="404111" cy="404111"/>
-          </a:xfrm>
-          <a:prstGeom prst="rect">
-            <a:avLst/>
-          </a:prstGeom>
-        </p:spPr>
-      </p:pic>
-      <p:sp>
-        <p:nvSpPr>
-          <p:cNvPr id="38" name="Text 35"/>
-          <p:cNvSpPr/>
-          <p:nvPr/>
-        </p:nvSpPr>
-        <p:spPr>
-          <a:xfrm>
-            <a:off x="9526019" y="3730565"/>
-            <a:ext cx="1719947" cy="371475"/>
-          </a:xfrm>
-          <a:prstGeom prst="rect">
-            <a:avLst/>
-          </a:prstGeom>
-          <a:noFill/>
-          <a:ln/>
-        </p:spPr>
-        <p:txBody>
-          <a:bodyPr wrap="square" lIns="25400" tIns="25400" rIns="25400" bIns="25400" rtlCol="0" anchor="t">
-            <a:normAutofit fontScale="85000" lnSpcReduction="10000"/>
-          </a:bodyPr>
-          <a:lstStyle/>
-          <a:p>
-            <a:pPr marL="0" indent="0" algn="l">
-              <a:buNone/>
-            </a:pPr>
-            <a:r>
-              <a:rPr lang="en-US" sz="2175" b="1" dirty="0">
-                <a:solidFill>
-                  <a:srgbClr val="4A4A4A"/>
-                </a:solidFill>
-                <a:latin typeface="맑은 고딕" panose="020B0503020000020004" pitchFamily="50" charset="-127"/>
-                <a:ea typeface="맑은 고딕" panose="020B0503020000020004" pitchFamily="50" charset="-127"/>
-                <a:cs typeface="Pretendard" pitchFamily="34" charset="-120"/>
-              </a:rPr>
-              <a:t>해외 여행 지원</a:t>
-            </a:r>
-            <a:endParaRPr lang="en-US" sz="2175" dirty="0">
-              <a:latin typeface="맑은 고딕" panose="020B0503020000020004" pitchFamily="50" charset="-127"/>
-            </a:endParaRPr>
-          </a:p>
-        </p:txBody>
-      </p:sp>
-      <p:sp>
-        <p:nvSpPr>
-          <p:cNvPr id="39" name="Shape 36"/>
-          <p:cNvSpPr/>
-          <p:nvPr/>
-        </p:nvSpPr>
-        <p:spPr>
-          <a:xfrm>
-            <a:off x="8821170" y="4425890"/>
-            <a:ext cx="3910148" cy="714375"/>
-          </a:xfrm>
-          <a:prstGeom prst="roundRect">
-            <a:avLst>
-              <a:gd name="adj" fmla="val 21333"/>
-            </a:avLst>
-          </a:prstGeom>
-          <a:solidFill>
-            <a:srgbClr val="E4EAF0"/>
-          </a:solidFill>
-          <a:ln/>
-        </p:spPr>
-        <p:txBody>
-          <a:bodyPr/>
-          <a:lstStyle/>
-          <a:p>
-            <a:endParaRPr lang="ko-KR" altLang="en-US"/>
-          </a:p>
-        </p:txBody>
-      </p:sp>
-      <p:pic>
-        <p:nvPicPr>
-          <p:cNvPr id="40" name="Image 1" descr="preencoded.png"/>
-          <p:cNvPicPr>
-            <a:picLocks noChangeAspect="1"/>
-          </p:cNvPicPr>
-          <p:nvPr/>
-        </p:nvPicPr>
-        <p:blipFill>
-          <a:blip>
+          <a:blip r:embed="rId4">
             <a:extLst>
               <a:ext uri="{96DAC541-7B7A-43D3-8B79-37D633B846F1}">
                 <asvg:svgBlip xmlns:asvg="http://schemas.microsoft.com/office/drawing/2016/SVG/main" r:embed="rId5"/>
@@ -14974,6 +17361,108 @@
         </p:blipFill>
         <p:spPr>
           <a:xfrm rot="2700000">
+            <a:off x="9009638" y="3695197"/>
+            <a:ext cx="404111" cy="404111"/>
+          </a:xfrm>
+          <a:prstGeom prst="rect">
+            <a:avLst/>
+          </a:prstGeom>
+        </p:spPr>
+      </p:pic>
+      <p:sp>
+        <p:nvSpPr>
+          <p:cNvPr id="38" name="Text 35"/>
+          <p:cNvSpPr/>
+          <p:nvPr/>
+        </p:nvSpPr>
+        <p:spPr>
+          <a:xfrm>
+            <a:off x="9526019" y="3730565"/>
+            <a:ext cx="1719947" cy="371475"/>
+          </a:xfrm>
+          <a:prstGeom prst="rect">
+            <a:avLst/>
+          </a:prstGeom>
+          <a:noFill/>
+          <a:ln/>
+        </p:spPr>
+        <p:txBody>
+          <a:bodyPr wrap="square" lIns="25400" tIns="25400" rIns="25400" bIns="25400" rtlCol="0" anchor="t">
+            <a:normAutofit fontScale="85000" lnSpcReduction="10000"/>
+          </a:bodyPr>
+          <a:lstStyle/>
+          <a:p>
+            <a:pPr marL="0" indent="0" algn="l">
+              <a:buNone/>
+            </a:pPr>
+            <a:r>
+              <a:rPr lang="en-US" sz="2175" b="1" dirty="0">
+                <a:solidFill>
+                  <a:srgbClr val="4A4A4A"/>
+                </a:solidFill>
+                <a:latin typeface="맑은 고딕" panose="020B0503020000020004" pitchFamily="50" charset="-127"/>
+                <a:ea typeface="맑은 고딕" panose="020B0503020000020004" pitchFamily="50" charset="-127"/>
+                <a:cs typeface="Pretendard" pitchFamily="34" charset="-120"/>
+              </a:rPr>
+              <a:t>해외 여행 지원</a:t>
+            </a:r>
+            <a:endParaRPr lang="en-US" sz="2175" dirty="0">
+              <a:latin typeface="맑은 고딕" panose="020B0503020000020004" pitchFamily="50" charset="-127"/>
+            </a:endParaRPr>
+          </a:p>
+        </p:txBody>
+      </p:sp>
+      <p:sp>
+        <p:nvSpPr>
+          <p:cNvPr id="39" name="Shape 36"/>
+          <p:cNvSpPr/>
+          <p:nvPr/>
+        </p:nvSpPr>
+        <p:spPr>
+          <a:xfrm>
+            <a:off x="8821170" y="4425890"/>
+            <a:ext cx="3910148" cy="714375"/>
+          </a:xfrm>
+          <a:prstGeom prst="roundRect">
+            <a:avLst>
+              <a:gd name="adj" fmla="val 21333"/>
+            </a:avLst>
+          </a:prstGeom>
+          <a:solidFill>
+            <a:srgbClr val="E4EAF0"/>
+          </a:solidFill>
+          <a:ln/>
+        </p:spPr>
+        <p:txBody>
+          <a:bodyPr/>
+          <a:lstStyle/>
+          <a:p>
+            <a:endParaRPr lang="ko-KR" altLang="en-US"/>
+          </a:p>
+        </p:txBody>
+      </p:sp>
+      <p:pic>
+        <p:nvPicPr>
+          <p:cNvPr id="40" name="Image 1" descr="preencoded.png"/>
+          <p:cNvPicPr>
+            <a:picLocks noChangeAspect="1"/>
+          </p:cNvPicPr>
+          <p:nvPr/>
+        </p:nvPicPr>
+        <p:blipFill>
+          <a:blip r:embed="rId4">
+            <a:extLst>
+              <a:ext uri="{96DAC541-7B7A-43D3-8B79-37D633B846F1}">
+                <asvg:svgBlip xmlns:asvg="http://schemas.microsoft.com/office/drawing/2016/SVG/main" r:embed="rId6"/>
+              </a:ext>
+            </a:extLst>
+          </a:blip>
+          <a:stretch>
+            <a:fillRect/>
+          </a:stretch>
+        </p:blipFill>
+        <p:spPr>
+          <a:xfrm rot="2700000">
             <a:off x="9009638" y="4581022"/>
             <a:ext cx="404111" cy="404111"/>
           </a:xfrm>
@@ -15063,10 +17552,10 @@
           <p:nvPr/>
         </p:nvPicPr>
         <p:blipFill>
-          <a:blip>
+          <a:blip r:embed="rId4">
             <a:extLst>
               <a:ext uri="{96DAC541-7B7A-43D3-8B79-37D633B846F1}">
-                <asvg:svgBlip xmlns:asvg="http://schemas.microsoft.com/office/drawing/2016/SVG/main" r:embed="rId6"/>
+                <asvg:svgBlip xmlns:asvg="http://schemas.microsoft.com/office/drawing/2016/SVG/main" r:embed="rId7"/>
               </a:ext>
             </a:extLst>
           </a:blip>
@@ -20684,10 +23173,10 @@
             <p:nvPr/>
           </p:nvPicPr>
           <p:blipFill>
-            <a:blip>
+            <a:blip r:embed="rId4">
               <a:extLst>
                 <a:ext uri="{96DAC541-7B7A-43D3-8B79-37D633B846F1}">
-                  <asvg:svgBlip xmlns:asvg="http://schemas.microsoft.com/office/drawing/2016/SVG/main" r:embed="rId4"/>
+                  <asvg:svgBlip xmlns:asvg="http://schemas.microsoft.com/office/drawing/2016/SVG/main" r:embed="rId5"/>
                 </a:ext>
               </a:extLst>
             </a:blip>
@@ -21203,10 +23692,10 @@
             <p:nvPr/>
           </p:nvPicPr>
           <p:blipFill>
-            <a:blip>
+            <a:blip r:embed="rId6">
               <a:extLst>
                 <a:ext uri="{96DAC541-7B7A-43D3-8B79-37D633B846F1}">
-                  <asvg:svgBlip xmlns:asvg="http://schemas.microsoft.com/office/drawing/2016/SVG/main" r:embed="rId5"/>
+                  <asvg:svgBlip xmlns:asvg="http://schemas.microsoft.com/office/drawing/2016/SVG/main" r:embed="rId7"/>
                 </a:ext>
               </a:extLst>
             </a:blip>
@@ -23561,10 +26050,10 @@
           <p:nvPr/>
         </p:nvPicPr>
         <p:blipFill>
-          <a:blip>
+          <a:blip r:embed="rId4">
             <a:extLst>
               <a:ext uri="{96DAC541-7B7A-43D3-8B79-37D633B846F1}">
-                <asvg:svgBlip xmlns:asvg="http://schemas.microsoft.com/office/drawing/2016/SVG/main" r:embed="rId4"/>
+                <asvg:svgBlip xmlns:asvg="http://schemas.microsoft.com/office/drawing/2016/SVG/main" r:embed="rId5"/>
               </a:ext>
             </a:extLst>
           </a:blip>
@@ -24436,10 +26925,10 @@
           <p:nvPr/>
         </p:nvPicPr>
         <p:blipFill>
-          <a:blip>
+          <a:blip r:embed="rId6">
             <a:extLst>
               <a:ext uri="{96DAC541-7B7A-43D3-8B79-37D633B846F1}">
-                <asvg:svgBlip xmlns:asvg="http://schemas.microsoft.com/office/drawing/2016/SVG/main" r:embed="rId5"/>
+                <asvg:svgBlip xmlns:asvg="http://schemas.microsoft.com/office/drawing/2016/SVG/main" r:embed="rId7"/>
               </a:ext>
             </a:extLst>
           </a:blip>
@@ -25734,7 +28223,7 @@
         </p:nvSpPr>
         <p:spPr>
           <a:xfrm>
-            <a:off x="7692033" y="4534208"/>
+            <a:off x="7692033" y="5143808"/>
             <a:ext cx="1219200" cy="314325"/>
           </a:xfrm>
           <a:prstGeom prst="rect">
@@ -25777,7 +28266,7 @@
         </p:nvSpPr>
         <p:spPr>
           <a:xfrm>
-            <a:off x="9082683" y="4634221"/>
+            <a:off x="9082683" y="5243821"/>
             <a:ext cx="3928467" cy="76200"/>
           </a:xfrm>
           <a:prstGeom prst="roundRect">
@@ -25806,7 +28295,7 @@
         </p:nvSpPr>
         <p:spPr>
           <a:xfrm>
-            <a:off x="10461129" y="4558021"/>
+            <a:off x="10461129" y="5167621"/>
             <a:ext cx="228600" cy="228600"/>
           </a:xfrm>
           <a:prstGeom prst="ellipse">
@@ -25838,7 +28327,7 @@
         </p:nvSpPr>
         <p:spPr>
           <a:xfrm>
-            <a:off x="13182600" y="4534208"/>
+            <a:off x="13182600" y="5143808"/>
             <a:ext cx="1219200" cy="314325"/>
           </a:xfrm>
           <a:prstGeom prst="rect">
@@ -25881,7 +28370,7 @@
         </p:nvSpPr>
         <p:spPr>
           <a:xfrm>
-            <a:off x="7692033" y="5000933"/>
+            <a:off x="7692033" y="5610533"/>
             <a:ext cx="1219200" cy="314325"/>
           </a:xfrm>
           <a:prstGeom prst="rect">
@@ -25924,7 +28413,7 @@
         </p:nvSpPr>
         <p:spPr>
           <a:xfrm>
-            <a:off x="9082683" y="5100946"/>
+            <a:off x="9082683" y="5710546"/>
             <a:ext cx="3928467" cy="76200"/>
           </a:xfrm>
           <a:prstGeom prst="roundRect">
@@ -25953,7 +28442,7 @@
         </p:nvSpPr>
         <p:spPr>
           <a:xfrm>
-            <a:off x="11561118" y="5024746"/>
+            <a:off x="11561118" y="5634346"/>
             <a:ext cx="228600" cy="228600"/>
           </a:xfrm>
           <a:prstGeom prst="ellipse">
@@ -25985,7 +28474,7 @@
         </p:nvSpPr>
         <p:spPr>
           <a:xfrm>
-            <a:off x="13182600" y="5000933"/>
+            <a:off x="13182600" y="5610533"/>
             <a:ext cx="1219200" cy="314325"/>
           </a:xfrm>
           <a:prstGeom prst="rect">
@@ -26028,7 +28517,7 @@
         </p:nvSpPr>
         <p:spPr>
           <a:xfrm>
-            <a:off x="7692033" y="5467658"/>
+            <a:off x="7692033" y="6077258"/>
             <a:ext cx="1219200" cy="314325"/>
           </a:xfrm>
           <a:prstGeom prst="rect">
@@ -26071,7 +28560,7 @@
         </p:nvSpPr>
         <p:spPr>
           <a:xfrm>
-            <a:off x="9082683" y="5567671"/>
+            <a:off x="9082683" y="6177271"/>
             <a:ext cx="3928467" cy="76200"/>
           </a:xfrm>
           <a:prstGeom prst="roundRect">
@@ -26100,7 +28589,7 @@
         </p:nvSpPr>
         <p:spPr>
           <a:xfrm>
-            <a:off x="10068223" y="5491471"/>
+            <a:off x="10068223" y="6101071"/>
             <a:ext cx="228600" cy="228600"/>
           </a:xfrm>
           <a:prstGeom prst="ellipse">
@@ -26132,7 +28621,7 @@
         </p:nvSpPr>
         <p:spPr>
           <a:xfrm>
-            <a:off x="13182600" y="5467658"/>
+            <a:off x="13182600" y="6077258"/>
             <a:ext cx="1219200" cy="314325"/>
           </a:xfrm>
           <a:prstGeom prst="rect">
@@ -26175,7 +28664,7 @@
         </p:nvSpPr>
         <p:spPr>
           <a:xfrm>
-            <a:off x="7692033" y="5934383"/>
+            <a:off x="7692033" y="6543983"/>
             <a:ext cx="1219200" cy="314325"/>
           </a:xfrm>
           <a:prstGeom prst="rect">
@@ -26218,7 +28707,7 @@
         </p:nvSpPr>
         <p:spPr>
           <a:xfrm>
-            <a:off x="9082683" y="6034396"/>
+            <a:off x="9082683" y="6643996"/>
             <a:ext cx="3928467" cy="76200"/>
           </a:xfrm>
           <a:prstGeom prst="roundRect">
@@ -26247,7 +28736,7 @@
         </p:nvSpPr>
         <p:spPr>
           <a:xfrm>
-            <a:off x="11089630" y="5958196"/>
+            <a:off x="11089630" y="6567796"/>
             <a:ext cx="228600" cy="228600"/>
           </a:xfrm>
           <a:prstGeom prst="ellipse">
@@ -26279,7 +28768,7 @@
         </p:nvSpPr>
         <p:spPr>
           <a:xfrm>
-            <a:off x="13182600" y="5934383"/>
+            <a:off x="13182600" y="6543983"/>
             <a:ext cx="1219200" cy="314325"/>
           </a:xfrm>
           <a:prstGeom prst="rect">
@@ -26309,126 +28798,6 @@
               <a:t>자연</a:t>
             </a:r>
             <a:endParaRPr lang="en-US" sz="1800" dirty="0">
-              <a:latin typeface="맑은 고딕" panose="020B0503020000020004" pitchFamily="50" charset="-127"/>
-            </a:endParaRPr>
-          </a:p>
-        </p:txBody>
-      </p:sp>
-      <p:sp>
-        <p:nvSpPr>
-          <p:cNvPr id="49" name="Shape 47"/>
-          <p:cNvSpPr/>
-          <p:nvPr/>
-        </p:nvSpPr>
-        <p:spPr>
-          <a:xfrm>
-            <a:off x="7768233" y="6477308"/>
-            <a:ext cx="6557367" cy="904875"/>
-          </a:xfrm>
-          <a:prstGeom prst="roundRect">
-            <a:avLst>
-              <a:gd name="adj" fmla="val 16842"/>
-            </a:avLst>
-          </a:prstGeom>
-          <a:solidFill>
-            <a:srgbClr val="FBF8EF"/>
-          </a:solidFill>
-          <a:ln w="19050">
-            <a:solidFill>
-              <a:srgbClr val="C7BFA9"/>
-            </a:solidFill>
-            <a:prstDash val="dash"/>
-          </a:ln>
-        </p:spPr>
-        <p:txBody>
-          <a:bodyPr/>
-          <a:lstStyle/>
-          <a:p>
-            <a:endParaRPr lang="ko-KR" altLang="en-US"/>
-          </a:p>
-        </p:txBody>
-      </p:sp>
-      <p:sp>
-        <p:nvSpPr>
-          <p:cNvPr id="50" name="Text 48"/>
-          <p:cNvSpPr/>
-          <p:nvPr/>
-        </p:nvSpPr>
-        <p:spPr>
-          <a:xfrm>
-            <a:off x="8034933" y="6758295"/>
-            <a:ext cx="597545" cy="381000"/>
-          </a:xfrm>
-          <a:prstGeom prst="rect">
-            <a:avLst/>
-          </a:prstGeom>
-          <a:noFill/>
-          <a:ln/>
-        </p:spPr>
-        <p:txBody>
-          <a:bodyPr wrap="square" lIns="25400" tIns="25400" rIns="25400" bIns="25400" rtlCol="0" anchor="t">
-            <a:normAutofit/>
-          </a:bodyPr>
-          <a:lstStyle/>
-          <a:p>
-            <a:pPr marL="0" indent="0" algn="l">
-              <a:buNone/>
-            </a:pPr>
-            <a:r>
-              <a:rPr lang="en-US" sz="1800" kern="0" spc="252" dirty="0">
-                <a:solidFill>
-                  <a:srgbClr val="9A9486"/>
-                </a:solidFill>
-                <a:latin typeface="Microsoft YaHei" panose="020B0503020204020204" pitchFamily="34" charset="-122"/>
-                <a:ea typeface="Microsoft YaHei" panose="020B0503020204020204" pitchFamily="34" charset="-122"/>
-                <a:cs typeface="Space Mono" pitchFamily="34" charset="-120"/>
-              </a:rPr>
-              <a:t>평균</a:t>
-            </a:r>
-            <a:endParaRPr lang="en-US" sz="1800" dirty="0">
-              <a:latin typeface="맑은 고딕" panose="020B0503020000020004" pitchFamily="50" charset="-127"/>
-            </a:endParaRPr>
-          </a:p>
-        </p:txBody>
-      </p:sp>
-      <p:sp>
-        <p:nvSpPr>
-          <p:cNvPr id="51" name="Text 49"/>
-          <p:cNvSpPr/>
-          <p:nvPr/>
-        </p:nvSpPr>
-        <p:spPr>
-          <a:xfrm>
-            <a:off x="8775770" y="6758295"/>
-            <a:ext cx="3592637" cy="523875"/>
-          </a:xfrm>
-          <a:prstGeom prst="rect">
-            <a:avLst/>
-          </a:prstGeom>
-          <a:noFill/>
-          <a:ln/>
-        </p:spPr>
-        <p:txBody>
-          <a:bodyPr wrap="square" lIns="25400" tIns="25400" rIns="25400" bIns="25400" rtlCol="0" anchor="t">
-            <a:normAutofit/>
-          </a:bodyPr>
-          <a:lstStyle/>
-          <a:p>
-            <a:pPr marL="0" indent="0" algn="l">
-              <a:buNone/>
-            </a:pPr>
-            <a:r>
-              <a:rPr lang="en-US" sz="2000" dirty="0">
-                <a:solidFill>
-                  <a:srgbClr val="7E97B3"/>
-                </a:solidFill>
-                <a:latin typeface="맑은 고딕" panose="020B0503020000020004" pitchFamily="50" charset="-127"/>
-                <a:ea typeface="맑은 고딕" panose="020B0503020000020004" pitchFamily="50" charset="-127"/>
-                <a:cs typeface="Black Han Sans" pitchFamily="34" charset="-120"/>
-              </a:rPr>
-              <a:t>맛집 탐방형 · 알뜰 여행러</a:t>
-            </a:r>
-            <a:endParaRPr lang="en-US" sz="2000" dirty="0">
               <a:latin typeface="맑은 고딕" panose="020B0503020000020004" pitchFamily="50" charset="-127"/>
             </a:endParaRPr>
           </a:p>
@@ -26943,10 +29312,10 @@
           <p:nvPr/>
         </p:nvPicPr>
         <p:blipFill>
-          <a:blip>
+          <a:blip r:embed="rId4">
             <a:extLst>
               <a:ext uri="{96DAC541-7B7A-43D3-8B79-37D633B846F1}">
-                <asvg:svgBlip xmlns:asvg="http://schemas.microsoft.com/office/drawing/2016/SVG/main" r:embed="rId4"/>
+                <asvg:svgBlip xmlns:asvg="http://schemas.microsoft.com/office/drawing/2016/SVG/main" r:embed="rId5"/>
               </a:ext>
             </a:extLst>
           </a:blip>
@@ -27096,7 +29465,7 @@
             </a:avLst>
           </a:prstGeom>
           <a:blipFill>
-            <a:blip r:embed="rId5"/>
+            <a:blip r:embed="rId6"/>
             <a:stretch>
               <a:fillRect/>
             </a:stretch>
@@ -27364,10 +29733,10 @@
           <p:nvPr/>
         </p:nvPicPr>
         <p:blipFill>
-          <a:blip>
+          <a:blip r:embed="rId7">
             <a:extLst>
               <a:ext uri="{96DAC541-7B7A-43D3-8B79-37D633B846F1}">
-                <asvg:svgBlip xmlns:asvg="http://schemas.microsoft.com/office/drawing/2016/SVG/main" r:embed="rId6"/>
+                <asvg:svgBlip xmlns:asvg="http://schemas.microsoft.com/office/drawing/2016/SVG/main" r:embed="rId8"/>
               </a:ext>
             </a:extLst>
           </a:blip>
@@ -27431,7 +29800,7 @@
             </a:avLst>
           </a:prstGeom>
           <a:blipFill>
-            <a:blip r:embed="rId7"/>
+            <a:blip r:embed="rId9"/>
             <a:stretch>
               <a:fillRect/>
             </a:stretch>
@@ -27721,10 +30090,10 @@
           <p:nvPr/>
         </p:nvPicPr>
         <p:blipFill>
-          <a:blip>
+          <a:blip r:embed="rId10">
             <a:extLst>
               <a:ext uri="{96DAC541-7B7A-43D3-8B79-37D633B846F1}">
-                <asvg:svgBlip xmlns:asvg="http://schemas.microsoft.com/office/drawing/2016/SVG/main" r:embed="rId8"/>
+                <asvg:svgBlip xmlns:asvg="http://schemas.microsoft.com/office/drawing/2016/SVG/main" r:embed="rId11"/>
               </a:ext>
             </a:extLst>
           </a:blip>
